--- a/10-Knowledge-Products/KP4-DSD/videos/module_1/en/decks/KP4_M1_Deck_v0.1.pptx
+++ b/10-Knowledge-Products/KP4-DSD/videos/module_1/en/decks/KP4_M1_Deck_v0.1.pptx
@@ -57,7 +57,6 @@
     <p:sldId id="2734" r:id="rId56"/>
     <p:sldId id="2735" r:id="rId57"/>
     <p:sldId id="2736" r:id="rId58"/>
-    <p:sldId id="2737" r:id="rId59"/>
   </p:sldIdLst>
   <p:sldSz cx="12192000" cy="6858000"/>
   <p:notesSz cx="6858000" cy="9144000"/>
@@ -2757,7 +2756,13 @@
           <a:p/>
           <a:p>
             <a:r>
-              <a:t>Slide specification: The documents are named by what they are for; no numbers of folders, no file names. The footer says the catalogue is not one of the twelve.</a:t>
+              <a:t>VO: The next three are written for each goal in turn: the goal as a story with every way it can fail, the screens worked out from that story, and a walk-through that officials can click. Then come two documents for the whole application: the interaction design, which settles once how officers pick, find, move and act, and the application model, the one file a program reads. The twelfth is the working application. Nobody writes it. A program generates it from the model, and nobody edits it by hand.</a:t>
+            </a:r>
+          </a:p>
+          <a:p/>
+          <a:p>
+            <a:r>
+              <a:t>Slide specification: Figure F3, its slide variant (figures/slides/F3_twelve-documents.png, drawn by the figure's own program in slide mode): the twelve names numbered 1 to 12 in two columns of six under four headings (before any design; one goal at a time; the whole application, once; generated by a program); the documents are named by what they are for, no file names; the footer says the catalogue is not one of the twelve; boxes, arrows and words only, no imagery and no person on screen. The rows are its text equivalent. Calibration item: a drawn figure under ITU's text-only rule.</a:t>
             </a:r>
           </a:p>
         </p:txBody>
@@ -2827,13 +2832,13 @@
           <a:lstStyle/>
           <a:p>
             <a:r>
-              <a:t>VO: The next three are written for each goal in turn: the goal as a story with every way it can fail, the screens worked out from that story, and a walk-through that officials can click. Then come two documents for the whole application: the interaction design, which settles once how officers pick, find, move and act, and the application model, the one file a program reads. The twelfth is the working application. Nobody writes it. A program generates it from the model, and nobody edits it by hand.</a:t>
+              <a:t>VO: In Progressa, PHEQA filled this table for its registration of institutions. For the register, an AI assistant extracts the entries, the supplier's analyst rules on each one, and the Registrar of PHEQA accepts it. For the screens of a goal, three people decide at a review: the owner of the screens, the builder, and the head of the registration desk. For the application model, the head of PHEQA's ICT unit approves it after reading what it assumed. And the working application is accepted when a registration officer finishes a real task on it.</a:t>
             </a:r>
           </a:p>
           <a:p/>
           <a:p>
             <a:r>
-              <a:t>Slide specification: Same layout as slide 3, so slides 3 and 4 read as one list of twelve. Text-only.</a:t>
+              <a:t>Slide specification: An extract of the filled table; the full table of twelve is in the written guide. Progressa's names as the plan gives them.</a:t>
             </a:r>
           </a:p>
         </p:txBody>
@@ -2903,13 +2908,13 @@
           <a:lstStyle/>
           <a:p>
             <a:r>
-              <a:t>VO: In Progressa, PHEQA filled this table for its registration of institutions. For the register, an AI assistant extracts the entries, the supplier's analyst rules on each one, and the Registrar of PHEQA accepts it. For the screens of a goal, three people decide at a review: the owner of the screens, the builder, and the head of the registration desk. For the application model, the head of PHEQA's ICT unit approves it after reading what it assumed. And the working application is accepted when a registration officer finishes a real task on it.</a:t>
+              <a:t>VO: Count the points where a person in PHEQA must say yes before the work goes on. There are nine. At each one, the next document is written from what was accepted, not from what was proposed. Two documents are written by nobody: a program produces the walk-through and the working application. Now lay your own project's documents beside the twelve. A missing row is a decision nobody will take in writing. A row with no point of acceptance is a place where the supplier, not your organisation, decides.</a:t>
             </a:r>
           </a:p>
           <a:p/>
           <a:p>
             <a:r>
-              <a:t>Slide specification: An extract of the filled table; the full table of twelve is in the written guide. Progressa's names as the plan gives them.</a:t>
+              <a:t>Slide specification: The figure nine is counted from the filled table of the worked example. Text-only.</a:t>
             </a:r>
           </a:p>
         </p:txBody>
@@ -2979,13 +2984,19 @@
           <a:lstStyle/>
           <a:p>
             <a:r>
-              <a:t>VO: Count the points where a person in PHEQA must say yes before the work goes on. There are nine. At each one, the next document is written from what was accepted, not from what was proposed. Two documents are written by nobody: a program produces the walk-through and the working application. Now lay your own project's documents beside the twelve. A missing row is a decision nobody will take in writing. A row with no point of acceptance is a place where the supplier, not your organisation, decides.</a:t>
+              <a:t>PRACTICE BOX (on-screen only — never read it, never paraphrase it, never point at it). It replaces the narrated handoff: this video ends on the recap.</a:t>
             </a:r>
           </a:p>
           <a:p/>
           <a:p>
             <a:r>
-              <a:t>Slide specification: The figure nine is counted from the filled table of the worked example. Text-only.</a:t>
+              <a:t>VO: Twelve documents, in a fixed order. For each one, ask who writes it, what goes in, what comes out, who accepts it and how it is checked.</a:t>
+            </a:r>
+          </a:p>
+          <a:p/>
+          <a:p>
+            <a:r>
+              <a:t>Slide specification: The single message, word for word. No sources slide follows: this subtopic cites no external source.</a:t>
             </a:r>
           </a:p>
         </p:txBody>
@@ -3055,19 +3066,7 @@
           <a:lstStyle/>
           <a:p>
             <a:r>
-              <a:t>PRACTICE BOX (on-screen only — never read it, never paraphrase it, never point at it). It replaces the narrated handoff: this video ends on the recap.</a:t>
-            </a:r>
-          </a:p>
-          <a:p/>
-          <a:p>
-            <a:r>
-              <a:t>VO: Twelve documents, in a fixed order. For each one, ask who writes it, what goes in, what comes out, who accepts it and how it is checked.</a:t>
-            </a:r>
-          </a:p>
-          <a:p/>
-          <a:p>
-            <a:r>
-              <a:t>Slide specification: The single message, word for word. No sources slide follows: this subtopic cites no external source.</a:t>
+              <a:t>Title card — the cold open. The hosts name the module, the video number, the title and the single message on this slide; no scripted narration. Hold until the opener begins; the opener is narrated on the next slide.</a:t>
             </a:r>
           </a:p>
         </p:txBody>
@@ -3137,7 +3136,7 @@
           <a:lstStyle/>
           <a:p>
             <a:r>
-              <a:t>Title card — the cold open. The hosts name the module, the video number, the title and the single message on this slide; no scripted narration. Hold until the opener begins; the opener is narrated on the next slide.</a:t>
+              <a:t>VO: An AI assistant can draft a register of requirements in an afternoon. That is real help. It also raises a question your minister will ask: if a machine wrote it, who is answerable for it?</a:t>
             </a:r>
           </a:p>
         </p:txBody>
@@ -3207,7 +3206,13 @@
           <a:lstStyle/>
           <a:p>
             <a:r>
-              <a:t>VO: An AI assistant can draft a register of requirements in an afternoon. That is real help. It also raises a question your minister will ask: if a machine wrote it, who is answerable for it?</a:t>
+              <a:t>VO: The SDD method's answer is simple. An AI assistant may draft any document a person would otherwise draft. It proposes; it never decides. A named person rules on each thing it proposes, and says one of three words: accepted, amended or set aside. The document then holds only what that person accepted, in that person's words. A draft is never accepted because it reads well. It is accepted line by line, by somebody whose name is on it, and who can be asked about it later.</a:t>
+            </a:r>
+          </a:p>
+          <a:p/>
+          <a:p>
+            <a:r>
+              <a:t>Slide specification: The three words in bold body text. Text-only.</a:t>
             </a:r>
           </a:p>
         </p:txBody>
@@ -3277,13 +3282,13 @@
           <a:lstStyle/>
           <a:p>
             <a:r>
-              <a:t>VO: The SDD method's answer is simple. An AI assistant may draft any document a person would otherwise draft. It proposes; it never decides. A named person rules on each thing it proposes, and says one of three words: accepted, amended or set aside. The document then holds only what that person accepted, in that person's words. A draft is never accepted because it reads well. It is accepted line by line, by somebody whose name is on it, and who can be asked about it later.</a:t>
+              <a:t>VO: Inventing something plausible is the thing an assistant does best. So the method binds it with one rule: a gap is recorded as a question with an owner, and never filled with an invented answer. When an official's text is silent, the assistant does not guess a figure to keep the work moving. It writes the question down, and a person decides who must answer it and by when. Every invented answer it avoids is one less fault hidden in the service.</a:t>
             </a:r>
           </a:p>
           <a:p/>
           <a:p>
             <a:r>
-              <a:t>Slide specification: The three words in bold body text. Text-only.</a:t>
+              <a:t>Slide specification: Text-only.</a:t>
             </a:r>
           </a:p>
         </p:txBody>
@@ -3353,13 +3358,13 @@
           <a:lstStyle/>
           <a:p>
             <a:r>
-              <a:t>VO: Inventing something plausible is the thing an assistant does best. So the method binds it with one rule: a gap is recorded as a question with an owner, and never filled with an invented answer. When an official's text is silent, the assistant does not guess a figure to keep the work moving. It writes the question down, and a person decides who must answer it and by when. Every invented answer it avoids is one less fault hidden in the service.</a:t>
+              <a:t>VO: For each of the twelve documents, three roles are named. Someone writes it. Someone else checks it. And a named person accepts it. In PHEQA's project in Progressa, the supplier's analyst and an AI assistant write. A second analyst of the supplier checks. The Registrar of PHEQA accepts, or the head of PHEQA's ICT unit for the technical documents. And the head of the registration desk sits at every review of something an officer will use.</a:t>
             </a:r>
           </a:p>
           <a:p/>
           <a:p>
             <a:r>
-              <a:t>Slide specification: Text-only.</a:t>
+              <a:t>Slide specification: Text-only. No picture of a person or a robot.</a:t>
             </a:r>
           </a:p>
         </p:txBody>
@@ -3499,13 +3504,13 @@
           <a:lstStyle/>
           <a:p>
             <a:r>
-              <a:t>VO: For each of the twelve documents, three roles are named. Someone writes it. Someone else checks it. And a named person accepts it. In PHEQA's project in Progressa, the supplier's analyst and an AI assistant write. A second analyst of the supplier checks. The Registrar of PHEQA accepts, or the head of PHEQA's ICT unit for the technical documents. And the head of the registration desk sits at every review of something an officer will use.</a:t>
+              <a:t>VO: In four of PHEQA's documents, an AI assistant does the writing. It extracts the register of what was asked. It helps write the shared settings and lists. It drafts each goal as a story. And it writes the application model, the file a program reads, under the rule that it must refuse to guess. In each of the four, a named person rules on what it wrote, and a different named person accepts it: the Registrar, the owner of each setting, or the head of the ICT unit.</a:t>
             </a:r>
           </a:p>
           <a:p/>
           <a:p>
             <a:r>
-              <a:t>Slide specification: Text-only. No picture of a person or a robot.</a:t>
+              <a:t>Slide specification: An extract of the table of the worked example; the full table of twelve is in the written guide. Progressa's names as the plan gives them.</a:t>
             </a:r>
           </a:p>
         </p:txBody>
@@ -3575,13 +3580,13 @@
           <a:lstStyle/>
           <a:p>
             <a:r>
-              <a:t>VO: In four of PHEQA's documents, an AI assistant does the writing. It extracts the register of what was asked. It helps write the shared settings and lists. It drafts each goal as a story. And it writes the application model, the file a program reads, under the rule that it must refuse to guess. In each of the four, a named person rules on what it wrote, and a different named person accepts it: the Registrar, the owner of each setting, or the head of the ICT unit.</a:t>
+              <a:t>VO: Ask your supplier for this table before the first document is written, and check three things. No row ends with the assistant. In no row does the writer accept alone: where a writer sits at a review, as the owner of the screens does, two other people must agree. And at every review of something an officer will use, the person who will live with the result sits beside the owner and the builder. If a cell under 'accepts' names the supplier, or names nobody, that decision has not been given to anyone in your organisation.</a:t>
             </a:r>
           </a:p>
           <a:p/>
           <a:p>
             <a:r>
-              <a:t>Slide specification: An extract of the table of the worked example; the full table of twelve is in the written guide. Progressa's names as the plan gives them.</a:t>
+              <a:t>Slide specification: Text-only.</a:t>
             </a:r>
           </a:p>
         </p:txBody>
@@ -3651,13 +3656,19 @@
           <a:lstStyle/>
           <a:p>
             <a:r>
-              <a:t>VO: Ask your supplier for this table before the first document is written, and check three things. No row ends with the assistant. In no row does the writer accept alone: where a writer sits at a review, as the owner of the screens does, two other people must agree. And at every review of something an officer will use, the person who will live with the result sits beside the owner and the builder. If a cell under 'accepts' names the supplier, or names nobody, that decision has not been given to anyone in your organisation.</a:t>
+              <a:t>PRACTICE BOX (on-screen only — never read it, never paraphrase it, never point at it). It replaces the narrated handoff: this video ends on the recap.</a:t>
             </a:r>
           </a:p>
           <a:p/>
           <a:p>
             <a:r>
-              <a:t>Slide specification: Text-only.</a:t>
+              <a:t>VO: An assistant may draft any document. A named person rules on each line, and only what that person accepted stands.</a:t>
+            </a:r>
+          </a:p>
+          <a:p/>
+          <a:p>
+            <a:r>
+              <a:t>Slide specification: The single message, word for word. No sources slide follows: this subtopic cites no external source.</a:t>
             </a:r>
           </a:p>
         </p:txBody>
@@ -3727,88 +3738,6 @@
           <a:lstStyle/>
           <a:p>
             <a:r>
-              <a:t>PRACTICE BOX (on-screen only — never read it, never paraphrase it, never point at it). It replaces the narrated handoff: this video ends on the recap.</a:t>
-            </a:r>
-          </a:p>
-          <a:p/>
-          <a:p>
-            <a:r>
-              <a:t>VO: An assistant may draft any document. A named person rules on each line, and only what that person accepted stands.</a:t>
-            </a:r>
-          </a:p>
-          <a:p/>
-          <a:p>
-            <a:r>
-              <a:t>Slide specification: The single message, word for word. No sources slide follows: this subtopic cites no external source.</a:t>
-            </a:r>
-          </a:p>
-        </p:txBody>
-      </p:sp>
-      <p:sp>
-        <p:nvSpPr>
-          <p:cNvPr id="4" name="Slide Number Placeholder 3"/>
-          <p:cNvSpPr>
-            <a:spLocks noGrp="1"/>
-          </p:cNvSpPr>
-          <p:nvPr>
-            <p:ph type="sldNum" idx="5" sz="quarter"/>
-          </p:nvPr>
-        </p:nvSpPr>
-        <p:spPr/>
-      </p:sp>
-    </p:spTree>
-  </p:cSld>
-  <p:clrMapOvr>
-    <a:masterClrMapping/>
-  </p:clrMapOvr>
-</p:notes>
-</file>
-
-<file path=ppt/notesSlides/notesSlide44.xml><?xml version="1.0" encoding="utf-8"?>
-<p:notes xmlns:a="http://schemas.openxmlformats.org/drawingml/2006/main" xmlns:p="http://schemas.openxmlformats.org/presentationml/2006/main" xmlns:r="http://schemas.openxmlformats.org/officeDocument/2006/relationships">
-  <p:cSld>
-    <p:spTree>
-      <p:nvGrpSpPr>
-        <p:cNvPr id="1" name=""/>
-        <p:cNvGrpSpPr/>
-        <p:nvPr/>
-      </p:nvGrpSpPr>
-      <p:grpSpPr>
-        <a:xfrm>
-          <a:off x="0" y="0"/>
-          <a:ext cx="0" cy="0"/>
-          <a:chOff x="0" y="0"/>
-          <a:chExt cx="0" cy="0"/>
-        </a:xfrm>
-      </p:grpSpPr>
-      <p:sp>
-        <p:nvSpPr>
-          <p:cNvPr id="2" name="Slide Image Placeholder 1"/>
-          <p:cNvSpPr>
-            <a:spLocks noGrp="1"/>
-          </p:cNvSpPr>
-          <p:nvPr>
-            <p:ph type="sldImg" idx="2"/>
-          </p:nvPr>
-        </p:nvSpPr>
-        <p:spPr/>
-      </p:sp>
-      <p:sp>
-        <p:nvSpPr>
-          <p:cNvPr id="3" name="Notes Placeholder 2"/>
-          <p:cNvSpPr>
-            <a:spLocks noGrp="1"/>
-          </p:cNvSpPr>
-          <p:nvPr>
-            <p:ph type="body" idx="3" sz="quarter"/>
-          </p:nvPr>
-        </p:nvSpPr>
-        <p:spPr/>
-        <p:txBody>
-          <a:bodyPr/>
-          <a:lstStyle/>
-          <a:p>
-            <a:r>
               <a:t>Closing slide for the combined deck. Individual videos end on their recap or sources slide instead.</a:t>
             </a:r>
           </a:p>
@@ -4113,7 +4042,7 @@
           <a:p/>
           <a:p>
             <a:r>
-              <a:t>Slide specification: The three places in the same words as slide 3, so the viewer can match them. Text boxes only.</a:t>
+              <a:t>Slide specification: Figure F2, its slide variant (figures/slides/F2_three-places.png, drawn by the figure's own program in slide mode): the three places on the way from the request to the running service, each with the loss of the worked example under it, in the same words as slide 3; boxes, arrows and words only, no imagery and no person on screen. The rows are its text equivalent. Calibration item: a drawn figure under ITU's text-only rule.</a:t>
             </a:r>
           </a:p>
         </p:txBody>
@@ -21149,64 +21078,35 @@
                 </a:solidFill>
                 <a:latin typeface="Arial"/>
               </a:rPr>
-              <a:t>Before any design: six documents</a:t>
-            </a:r>
-          </a:p>
-        </p:txBody>
-      </p:sp>
-      <p:sp>
-        <p:nvSpPr>
-          <p:cNvPr id="4" name="Oval 3"/>
-          <p:cNvSpPr/>
+              <a:t>Twelve documents, in a fixed order</a:t>
+            </a:r>
+          </a:p>
+        </p:txBody>
+      </p:sp>
+      <p:pic>
+        <p:nvPicPr>
+          <p:cNvPr id="4" name="kp4-figure F3" descr="F3_twelve-documents.png"/>
+          <p:cNvPicPr>
+            <a:picLocks noChangeAspect="1"/>
+          </p:cNvPicPr>
           <p:nvPr/>
-        </p:nvSpPr>
-        <p:spPr>
-          <a:xfrm>
-            <a:off x="621792" y="1508760"/>
-            <a:ext cx="310896" cy="310896"/>
-          </a:xfrm>
-          <a:prstGeom prst="ellipse">
-            <a:avLst/>
-          </a:prstGeom>
-          <a:solidFill>
-            <a:srgbClr val="009CD6"/>
-          </a:solidFill>
-          <a:ln>
-            <a:noFill/>
-          </a:ln>
-          <a:effectLst/>
-        </p:spPr>
-        <p:style>
-          <a:lnRef idx="1">
-            <a:schemeClr val="accent1"/>
-          </a:lnRef>
-          <a:fillRef idx="3">
-            <a:schemeClr val="accent1"/>
-          </a:fillRef>
-          <a:effectRef idx="2">
-            <a:schemeClr val="accent1"/>
-          </a:effectRef>
-          <a:fontRef idx="minor">
-            <a:schemeClr val="lt1"/>
-          </a:fontRef>
-        </p:style>
-        <p:txBody>
-          <a:bodyPr rtlCol="0" anchor="ctr" lIns="0" rIns="0" tIns="0" bIns="0" wrap="square"/>
-          <a:lstStyle/>
-          <a:p>
-            <a:pPr algn="ctr"/>
-            <a:r>
-              <a:rPr sz="1300" b="1" i="0">
-                <a:solidFill>
-                  <a:srgbClr val="FFFFFF"/>
-                </a:solidFill>
-                <a:latin typeface="Arial"/>
-              </a:rPr>
-              <a:t>1</a:t>
-            </a:r>
-          </a:p>
-        </p:txBody>
-      </p:sp>
+        </p:nvPicPr>
+        <p:blipFill>
+          <a:blip r:embed="rId2"/>
+          <a:stretch>
+            <a:fillRect/>
+          </a:stretch>
+        </p:blipFill>
+        <p:spPr>
+          <a:xfrm>
+            <a:off x="1558534" y="1280160"/>
+            <a:ext cx="9081027" cy="4526280"/>
+          </a:xfrm>
+          <a:prstGeom prst="rect">
+            <a:avLst/>
+          </a:prstGeom>
+        </p:spPr>
+      </p:pic>
       <p:sp>
         <p:nvSpPr>
           <p:cNvPr id="5" name="TextBox 4"/>
@@ -21215,8 +21115,8 @@
         </p:nvSpPr>
         <p:spPr>
           <a:xfrm>
-            <a:off x="1115568" y="1463040"/>
-            <a:ext cx="10527487" cy="670559"/>
+            <a:off x="658368" y="5916168"/>
+            <a:ext cx="10881360" cy="457200"/>
           </a:xfrm>
           <a:prstGeom prst="rect">
             <a:avLst/>
@@ -21229,732 +21129,13 @@
           </a:bodyPr>
           <a:lstStyle/>
           <a:p>
-            <a:pPr>
-              <a:spcAft>
-                <a:spcPts val="300"/>
-              </a:spcAft>
-            </a:pPr>
-            <a:r>
-              <a:rPr sz="1900" b="1" i="0">
-                <a:solidFill>
-                  <a:srgbClr val="1A1A1A"/>
+            <a:r>
+              <a:rPr sz="1550" b="1" i="0">
+                <a:solidFill>
+                  <a:srgbClr val="006E96"/>
                 </a:solidFill>
                 <a:latin typeface="Arial"/>
               </a:rPr>
-              <a:t>Your own documents: the law, the mandate, the requests.</a:t>
-            </a:r>
-          </a:p>
-        </p:txBody>
-      </p:sp>
-      <p:sp>
-        <p:nvSpPr>
-          <p:cNvPr id="6" name="Rectangle 5"/>
-          <p:cNvSpPr/>
-          <p:nvPr/>
-        </p:nvSpPr>
-        <p:spPr>
-          <a:xfrm>
-            <a:off x="621792" y="2138172"/>
-            <a:ext cx="10881360" cy="12700"/>
-          </a:xfrm>
-          <a:prstGeom prst="rect">
-            <a:avLst/>
-          </a:prstGeom>
-          <a:solidFill>
-            <a:srgbClr val="DDECF4"/>
-          </a:solidFill>
-          <a:ln>
-            <a:noFill/>
-          </a:ln>
-          <a:effectLst/>
-        </p:spPr>
-        <p:style>
-          <a:lnRef idx="1">
-            <a:schemeClr val="accent1"/>
-          </a:lnRef>
-          <a:fillRef idx="3">
-            <a:schemeClr val="accent1"/>
-          </a:fillRef>
-          <a:effectRef idx="2">
-            <a:schemeClr val="accent1"/>
-          </a:effectRef>
-          <a:fontRef idx="minor">
-            <a:schemeClr val="lt1"/>
-          </a:fontRef>
-        </p:style>
-        <p:txBody>
-          <a:bodyPr rtlCol="0" anchor="ctr"/>
-          <a:lstStyle/>
-          <a:p>
-            <a:pPr algn="ctr"/>
-          </a:p>
-        </p:txBody>
-      </p:sp>
-      <p:sp>
-        <p:nvSpPr>
-          <p:cNvPr id="7" name="Oval 6"/>
-          <p:cNvSpPr/>
-          <p:nvPr/>
-        </p:nvSpPr>
-        <p:spPr>
-          <a:xfrm>
-            <a:off x="621792" y="2225040"/>
-            <a:ext cx="310896" cy="310896"/>
-          </a:xfrm>
-          <a:prstGeom prst="ellipse">
-            <a:avLst/>
-          </a:prstGeom>
-          <a:solidFill>
-            <a:srgbClr val="009CD6"/>
-          </a:solidFill>
-          <a:ln>
-            <a:noFill/>
-          </a:ln>
-          <a:effectLst/>
-        </p:spPr>
-        <p:style>
-          <a:lnRef idx="1">
-            <a:schemeClr val="accent1"/>
-          </a:lnRef>
-          <a:fillRef idx="3">
-            <a:schemeClr val="accent1"/>
-          </a:fillRef>
-          <a:effectRef idx="2">
-            <a:schemeClr val="accent1"/>
-          </a:effectRef>
-          <a:fontRef idx="minor">
-            <a:schemeClr val="lt1"/>
-          </a:fontRef>
-        </p:style>
-        <p:txBody>
-          <a:bodyPr rtlCol="0" anchor="ctr" lIns="0" rIns="0" tIns="0" bIns="0" wrap="square"/>
-          <a:lstStyle/>
-          <a:p>
-            <a:pPr algn="ctr"/>
-            <a:r>
-              <a:rPr sz="1300" b="1" i="0">
-                <a:solidFill>
-                  <a:srgbClr val="FFFFFF"/>
-                </a:solidFill>
-                <a:latin typeface="Arial"/>
-              </a:rPr>
-              <a:t>2</a:t>
-            </a:r>
-          </a:p>
-        </p:txBody>
-      </p:sp>
-      <p:sp>
-        <p:nvSpPr>
-          <p:cNvPr id="8" name="TextBox 7"/>
-          <p:cNvSpPr txBox="1"/>
-          <p:nvPr/>
-        </p:nvSpPr>
-        <p:spPr>
-          <a:xfrm>
-            <a:off x="1115568" y="2179320"/>
-            <a:ext cx="10527487" cy="670559"/>
-          </a:xfrm>
-          <a:prstGeom prst="rect">
-            <a:avLst/>
-          </a:prstGeom>
-          <a:noFill/>
-        </p:spPr>
-        <p:txBody>
-          <a:bodyPr wrap="square">
-            <a:spAutoFit/>
-          </a:bodyPr>
-          <a:lstStyle/>
-          <a:p>
-            <a:pPr>
-              <a:spcAft>
-                <a:spcPts val="300"/>
-              </a:spcAft>
-            </a:pPr>
-            <a:r>
-              <a:rPr sz="1900" b="1" i="0">
-                <a:solidFill>
-                  <a:srgbClr val="1A1A1A"/>
-                </a:solidFill>
-                <a:latin typeface="Arial"/>
-              </a:rPr>
-              <a:t>The register of what was asked.</a:t>
-            </a:r>
-          </a:p>
-        </p:txBody>
-      </p:sp>
-      <p:sp>
-        <p:nvSpPr>
-          <p:cNvPr id="9" name="Rectangle 8"/>
-          <p:cNvSpPr/>
-          <p:nvPr/>
-        </p:nvSpPr>
-        <p:spPr>
-          <a:xfrm>
-            <a:off x="621792" y="2854452"/>
-            <a:ext cx="10881360" cy="12700"/>
-          </a:xfrm>
-          <a:prstGeom prst="rect">
-            <a:avLst/>
-          </a:prstGeom>
-          <a:solidFill>
-            <a:srgbClr val="DDECF4"/>
-          </a:solidFill>
-          <a:ln>
-            <a:noFill/>
-          </a:ln>
-          <a:effectLst/>
-        </p:spPr>
-        <p:style>
-          <a:lnRef idx="1">
-            <a:schemeClr val="accent1"/>
-          </a:lnRef>
-          <a:fillRef idx="3">
-            <a:schemeClr val="accent1"/>
-          </a:fillRef>
-          <a:effectRef idx="2">
-            <a:schemeClr val="accent1"/>
-          </a:effectRef>
-          <a:fontRef idx="minor">
-            <a:schemeClr val="lt1"/>
-          </a:fontRef>
-        </p:style>
-        <p:txBody>
-          <a:bodyPr rtlCol="0" anchor="ctr"/>
-          <a:lstStyle/>
-          <a:p>
-            <a:pPr algn="ctr"/>
-          </a:p>
-        </p:txBody>
-      </p:sp>
-      <p:sp>
-        <p:nvSpPr>
-          <p:cNvPr id="10" name="Oval 9"/>
-          <p:cNvSpPr/>
-          <p:nvPr/>
-        </p:nvSpPr>
-        <p:spPr>
-          <a:xfrm>
-            <a:off x="621792" y="2941319"/>
-            <a:ext cx="310896" cy="310896"/>
-          </a:xfrm>
-          <a:prstGeom prst="ellipse">
-            <a:avLst/>
-          </a:prstGeom>
-          <a:solidFill>
-            <a:srgbClr val="009CD6"/>
-          </a:solidFill>
-          <a:ln>
-            <a:noFill/>
-          </a:ln>
-          <a:effectLst/>
-        </p:spPr>
-        <p:style>
-          <a:lnRef idx="1">
-            <a:schemeClr val="accent1"/>
-          </a:lnRef>
-          <a:fillRef idx="3">
-            <a:schemeClr val="accent1"/>
-          </a:fillRef>
-          <a:effectRef idx="2">
-            <a:schemeClr val="accent1"/>
-          </a:effectRef>
-          <a:fontRef idx="minor">
-            <a:schemeClr val="lt1"/>
-          </a:fontRef>
-        </p:style>
-        <p:txBody>
-          <a:bodyPr rtlCol="0" anchor="ctr" lIns="0" rIns="0" tIns="0" bIns="0" wrap="square"/>
-          <a:lstStyle/>
-          <a:p>
-            <a:pPr algn="ctr"/>
-            <a:r>
-              <a:rPr sz="1300" b="1" i="0">
-                <a:solidFill>
-                  <a:srgbClr val="FFFFFF"/>
-                </a:solidFill>
-                <a:latin typeface="Arial"/>
-              </a:rPr>
-              <a:t>3</a:t>
-            </a:r>
-          </a:p>
-        </p:txBody>
-      </p:sp>
-      <p:sp>
-        <p:nvSpPr>
-          <p:cNvPr id="11" name="TextBox 10"/>
-          <p:cNvSpPr txBox="1"/>
-          <p:nvPr/>
-        </p:nvSpPr>
-        <p:spPr>
-          <a:xfrm>
-            <a:off x="1115568" y="2895600"/>
-            <a:ext cx="10527487" cy="670559"/>
-          </a:xfrm>
-          <a:prstGeom prst="rect">
-            <a:avLst/>
-          </a:prstGeom>
-          <a:noFill/>
-        </p:spPr>
-        <p:txBody>
-          <a:bodyPr wrap="square">
-            <a:spAutoFit/>
-          </a:bodyPr>
-          <a:lstStyle/>
-          <a:p>
-            <a:pPr>
-              <a:spcAft>
-                <a:spcPts val="300"/>
-              </a:spcAft>
-            </a:pPr>
-            <a:r>
-              <a:rPr sz="1900" b="1" i="0">
-                <a:solidFill>
-                  <a:srgbClr val="1A1A1A"/>
-                </a:solidFill>
-                <a:latin typeface="Arial"/>
-              </a:rPr>
-              <a:t>The records the service keeps.</a:t>
-            </a:r>
-          </a:p>
-        </p:txBody>
-      </p:sp>
-      <p:sp>
-        <p:nvSpPr>
-          <p:cNvPr id="12" name="Rectangle 11"/>
-          <p:cNvSpPr/>
-          <p:nvPr/>
-        </p:nvSpPr>
-        <p:spPr>
-          <a:xfrm>
-            <a:off x="621792" y="3570732"/>
-            <a:ext cx="10881360" cy="12700"/>
-          </a:xfrm>
-          <a:prstGeom prst="rect">
-            <a:avLst/>
-          </a:prstGeom>
-          <a:solidFill>
-            <a:srgbClr val="DDECF4"/>
-          </a:solidFill>
-          <a:ln>
-            <a:noFill/>
-          </a:ln>
-          <a:effectLst/>
-        </p:spPr>
-        <p:style>
-          <a:lnRef idx="1">
-            <a:schemeClr val="accent1"/>
-          </a:lnRef>
-          <a:fillRef idx="3">
-            <a:schemeClr val="accent1"/>
-          </a:fillRef>
-          <a:effectRef idx="2">
-            <a:schemeClr val="accent1"/>
-          </a:effectRef>
-          <a:fontRef idx="minor">
-            <a:schemeClr val="lt1"/>
-          </a:fontRef>
-        </p:style>
-        <p:txBody>
-          <a:bodyPr rtlCol="0" anchor="ctr"/>
-          <a:lstStyle/>
-          <a:p>
-            <a:pPr algn="ctr"/>
-          </a:p>
-        </p:txBody>
-      </p:sp>
-      <p:sp>
-        <p:nvSpPr>
-          <p:cNvPr id="13" name="Oval 12"/>
-          <p:cNvSpPr/>
-          <p:nvPr/>
-        </p:nvSpPr>
-        <p:spPr>
-          <a:xfrm>
-            <a:off x="621792" y="3657599"/>
-            <a:ext cx="310896" cy="310896"/>
-          </a:xfrm>
-          <a:prstGeom prst="ellipse">
-            <a:avLst/>
-          </a:prstGeom>
-          <a:solidFill>
-            <a:srgbClr val="009CD6"/>
-          </a:solidFill>
-          <a:ln>
-            <a:noFill/>
-          </a:ln>
-          <a:effectLst/>
-        </p:spPr>
-        <p:style>
-          <a:lnRef idx="1">
-            <a:schemeClr val="accent1"/>
-          </a:lnRef>
-          <a:fillRef idx="3">
-            <a:schemeClr val="accent1"/>
-          </a:fillRef>
-          <a:effectRef idx="2">
-            <a:schemeClr val="accent1"/>
-          </a:effectRef>
-          <a:fontRef idx="minor">
-            <a:schemeClr val="lt1"/>
-          </a:fontRef>
-        </p:style>
-        <p:txBody>
-          <a:bodyPr rtlCol="0" anchor="ctr" lIns="0" rIns="0" tIns="0" bIns="0" wrap="square"/>
-          <a:lstStyle/>
-          <a:p>
-            <a:pPr algn="ctr"/>
-            <a:r>
-              <a:rPr sz="1300" b="1" i="0">
-                <a:solidFill>
-                  <a:srgbClr val="FFFFFF"/>
-                </a:solidFill>
-                <a:latin typeface="Arial"/>
-              </a:rPr>
-              <a:t>4</a:t>
-            </a:r>
-          </a:p>
-        </p:txBody>
-      </p:sp>
-      <p:sp>
-        <p:nvSpPr>
-          <p:cNvPr id="14" name="TextBox 13"/>
-          <p:cNvSpPr txBox="1"/>
-          <p:nvPr/>
-        </p:nvSpPr>
-        <p:spPr>
-          <a:xfrm>
-            <a:off x="1115568" y="3611879"/>
-            <a:ext cx="10527487" cy="670559"/>
-          </a:xfrm>
-          <a:prstGeom prst="rect">
-            <a:avLst/>
-          </a:prstGeom>
-          <a:noFill/>
-        </p:spPr>
-        <p:txBody>
-          <a:bodyPr wrap="square">
-            <a:spAutoFit/>
-          </a:bodyPr>
-          <a:lstStyle/>
-          <a:p>
-            <a:pPr>
-              <a:spcAft>
-                <a:spcPts val="300"/>
-              </a:spcAft>
-            </a:pPr>
-            <a:r>
-              <a:rPr sz="1900" b="1" i="0">
-                <a:solidFill>
-                  <a:srgbClr val="1A1A1A"/>
-                </a:solidFill>
-                <a:latin typeface="Arial"/>
-              </a:rPr>
-              <a:t>Every goal, tied to what was asked.</a:t>
-            </a:r>
-          </a:p>
-        </p:txBody>
-      </p:sp>
-      <p:sp>
-        <p:nvSpPr>
-          <p:cNvPr id="15" name="Rectangle 14"/>
-          <p:cNvSpPr/>
-          <p:nvPr/>
-        </p:nvSpPr>
-        <p:spPr>
-          <a:xfrm>
-            <a:off x="621792" y="4287011"/>
-            <a:ext cx="10881360" cy="12700"/>
-          </a:xfrm>
-          <a:prstGeom prst="rect">
-            <a:avLst/>
-          </a:prstGeom>
-          <a:solidFill>
-            <a:srgbClr val="DDECF4"/>
-          </a:solidFill>
-          <a:ln>
-            <a:noFill/>
-          </a:ln>
-          <a:effectLst/>
-        </p:spPr>
-        <p:style>
-          <a:lnRef idx="1">
-            <a:schemeClr val="accent1"/>
-          </a:lnRef>
-          <a:fillRef idx="3">
-            <a:schemeClr val="accent1"/>
-          </a:fillRef>
-          <a:effectRef idx="2">
-            <a:schemeClr val="accent1"/>
-          </a:effectRef>
-          <a:fontRef idx="minor">
-            <a:schemeClr val="lt1"/>
-          </a:fontRef>
-        </p:style>
-        <p:txBody>
-          <a:bodyPr rtlCol="0" anchor="ctr"/>
-          <a:lstStyle/>
-          <a:p>
-            <a:pPr algn="ctr"/>
-          </a:p>
-        </p:txBody>
-      </p:sp>
-      <p:sp>
-        <p:nvSpPr>
-          <p:cNvPr id="16" name="Oval 15"/>
-          <p:cNvSpPr/>
-          <p:nvPr/>
-        </p:nvSpPr>
-        <p:spPr>
-          <a:xfrm>
-            <a:off x="621792" y="4373879"/>
-            <a:ext cx="310896" cy="310896"/>
-          </a:xfrm>
-          <a:prstGeom prst="ellipse">
-            <a:avLst/>
-          </a:prstGeom>
-          <a:solidFill>
-            <a:srgbClr val="009CD6"/>
-          </a:solidFill>
-          <a:ln>
-            <a:noFill/>
-          </a:ln>
-          <a:effectLst/>
-        </p:spPr>
-        <p:style>
-          <a:lnRef idx="1">
-            <a:schemeClr val="accent1"/>
-          </a:lnRef>
-          <a:fillRef idx="3">
-            <a:schemeClr val="accent1"/>
-          </a:fillRef>
-          <a:effectRef idx="2">
-            <a:schemeClr val="accent1"/>
-          </a:effectRef>
-          <a:fontRef idx="minor">
-            <a:schemeClr val="lt1"/>
-          </a:fontRef>
-        </p:style>
-        <p:txBody>
-          <a:bodyPr rtlCol="0" anchor="ctr" lIns="0" rIns="0" tIns="0" bIns="0" wrap="square"/>
-          <a:lstStyle/>
-          <a:p>
-            <a:pPr algn="ctr"/>
-            <a:r>
-              <a:rPr sz="1300" b="1" i="0">
-                <a:solidFill>
-                  <a:srgbClr val="FFFFFF"/>
-                </a:solidFill>
-                <a:latin typeface="Arial"/>
-              </a:rPr>
-              <a:t>5</a:t>
-            </a:r>
-          </a:p>
-        </p:txBody>
-      </p:sp>
-      <p:sp>
-        <p:nvSpPr>
-          <p:cNvPr id="17" name="TextBox 16"/>
-          <p:cNvSpPr txBox="1"/>
-          <p:nvPr/>
-        </p:nvSpPr>
-        <p:spPr>
-          <a:xfrm>
-            <a:off x="1115568" y="4328159"/>
-            <a:ext cx="10527487" cy="670559"/>
-          </a:xfrm>
-          <a:prstGeom prst="rect">
-            <a:avLst/>
-          </a:prstGeom>
-          <a:noFill/>
-        </p:spPr>
-        <p:txBody>
-          <a:bodyPr wrap="square">
-            <a:spAutoFit/>
-          </a:bodyPr>
-          <a:lstStyle/>
-          <a:p>
-            <a:pPr>
-              <a:spcAft>
-                <a:spcPts val="300"/>
-              </a:spcAft>
-            </a:pPr>
-            <a:r>
-              <a:rPr sz="1900" b="1" i="0">
-                <a:solidFill>
-                  <a:srgbClr val="1A1A1A"/>
-                </a:solidFill>
-                <a:latin typeface="Arial"/>
-              </a:rPr>
-              <a:t>The architecture.</a:t>
-            </a:r>
-          </a:p>
-        </p:txBody>
-      </p:sp>
-      <p:sp>
-        <p:nvSpPr>
-          <p:cNvPr id="18" name="Rectangle 17"/>
-          <p:cNvSpPr/>
-          <p:nvPr/>
-        </p:nvSpPr>
-        <p:spPr>
-          <a:xfrm>
-            <a:off x="621792" y="5003291"/>
-            <a:ext cx="10881360" cy="12700"/>
-          </a:xfrm>
-          <a:prstGeom prst="rect">
-            <a:avLst/>
-          </a:prstGeom>
-          <a:solidFill>
-            <a:srgbClr val="DDECF4"/>
-          </a:solidFill>
-          <a:ln>
-            <a:noFill/>
-          </a:ln>
-          <a:effectLst/>
-        </p:spPr>
-        <p:style>
-          <a:lnRef idx="1">
-            <a:schemeClr val="accent1"/>
-          </a:lnRef>
-          <a:fillRef idx="3">
-            <a:schemeClr val="accent1"/>
-          </a:fillRef>
-          <a:effectRef idx="2">
-            <a:schemeClr val="accent1"/>
-          </a:effectRef>
-          <a:fontRef idx="minor">
-            <a:schemeClr val="lt1"/>
-          </a:fontRef>
-        </p:style>
-        <p:txBody>
-          <a:bodyPr rtlCol="0" anchor="ctr"/>
-          <a:lstStyle/>
-          <a:p>
-            <a:pPr algn="ctr"/>
-          </a:p>
-        </p:txBody>
-      </p:sp>
-      <p:sp>
-        <p:nvSpPr>
-          <p:cNvPr id="19" name="Oval 18"/>
-          <p:cNvSpPr/>
-          <p:nvPr/>
-        </p:nvSpPr>
-        <p:spPr>
-          <a:xfrm>
-            <a:off x="621792" y="5090159"/>
-            <a:ext cx="310896" cy="310896"/>
-          </a:xfrm>
-          <a:prstGeom prst="ellipse">
-            <a:avLst/>
-          </a:prstGeom>
-          <a:solidFill>
-            <a:srgbClr val="009CD6"/>
-          </a:solidFill>
-          <a:ln>
-            <a:noFill/>
-          </a:ln>
-          <a:effectLst/>
-        </p:spPr>
-        <p:style>
-          <a:lnRef idx="1">
-            <a:schemeClr val="accent1"/>
-          </a:lnRef>
-          <a:fillRef idx="3">
-            <a:schemeClr val="accent1"/>
-          </a:fillRef>
-          <a:effectRef idx="2">
-            <a:schemeClr val="accent1"/>
-          </a:effectRef>
-          <a:fontRef idx="minor">
-            <a:schemeClr val="lt1"/>
-          </a:fontRef>
-        </p:style>
-        <p:txBody>
-          <a:bodyPr rtlCol="0" anchor="ctr" lIns="0" rIns="0" tIns="0" bIns="0" wrap="square"/>
-          <a:lstStyle/>
-          <a:p>
-            <a:pPr algn="ctr"/>
-            <a:r>
-              <a:rPr sz="1300" b="1" i="0">
-                <a:solidFill>
-                  <a:srgbClr val="FFFFFF"/>
-                </a:solidFill>
-                <a:latin typeface="Arial"/>
-              </a:rPr>
-              <a:t>6</a:t>
-            </a:r>
-          </a:p>
-        </p:txBody>
-      </p:sp>
-      <p:sp>
-        <p:nvSpPr>
-          <p:cNvPr id="20" name="TextBox 19"/>
-          <p:cNvSpPr txBox="1"/>
-          <p:nvPr/>
-        </p:nvSpPr>
-        <p:spPr>
-          <a:xfrm>
-            <a:off x="1115568" y="5044439"/>
-            <a:ext cx="10527487" cy="670559"/>
-          </a:xfrm>
-          <a:prstGeom prst="rect">
-            <a:avLst/>
-          </a:prstGeom>
-          <a:noFill/>
-        </p:spPr>
-        <p:txBody>
-          <a:bodyPr wrap="square">
-            <a:spAutoFit/>
-          </a:bodyPr>
-          <a:lstStyle/>
-          <a:p>
-            <a:pPr>
-              <a:spcAft>
-                <a:spcPts val="300"/>
-              </a:spcAft>
-            </a:pPr>
-            <a:r>
-              <a:rPr sz="1900" b="1" i="0">
-                <a:solidFill>
-                  <a:srgbClr val="1A1A1A"/>
-                </a:solidFill>
-                <a:latin typeface="Arial"/>
-              </a:rPr>
-              <a:t>The shared states, settings and lists.</a:t>
-            </a:r>
-          </a:p>
-        </p:txBody>
-      </p:sp>
-      <p:sp>
-        <p:nvSpPr>
-          <p:cNvPr id="21" name="TextBox 20"/>
-          <p:cNvSpPr txBox="1"/>
-          <p:nvPr/>
-        </p:nvSpPr>
-        <p:spPr>
-          <a:xfrm>
-            <a:off x="658368" y="5870448"/>
-            <a:ext cx="10881360" cy="548640"/>
-          </a:xfrm>
-          <a:prstGeom prst="rect">
-            <a:avLst/>
-          </a:prstGeom>
-          <a:noFill/>
-        </p:spPr>
-        <p:txBody>
-          <a:bodyPr wrap="square">
-            <a:spAutoFit/>
-          </a:bodyPr>
-          <a:lstStyle/>
-          <a:p>
-            <a:r>
-              <a:rPr sz="1550" b="1" i="0">
-                <a:solidFill>
-                  <a:srgbClr val="006E96"/>
-                </a:solidFill>
-                <a:latin typeface="Arial"/>
-              </a:rPr>
               <a:t>Written once for the whole sector, before the first: the catalogue of services.</a:t>
             </a:r>
           </a:p>
@@ -21962,7 +21143,7 @@
       </p:sp>
       <p:sp>
         <p:nvSpPr>
-          <p:cNvPr id="22" name="TextBox 21"/>
+          <p:cNvPr id="6" name="TextBox 5"/>
           <p:cNvSpPr txBox="1"/>
           <p:nvPr/>
         </p:nvSpPr>
@@ -22085,74 +21266,21 @@
                 </a:solidFill>
                 <a:latin typeface="Arial"/>
               </a:rPr>
-              <a:t>One goal at a time, then the whole application</a:t>
-            </a:r>
-          </a:p>
-        </p:txBody>
-      </p:sp>
-      <p:sp>
-        <p:nvSpPr>
-          <p:cNvPr id="4" name="Oval 3"/>
-          <p:cNvSpPr/>
-          <p:nvPr/>
-        </p:nvSpPr>
-        <p:spPr>
-          <a:xfrm>
-            <a:off x="621792" y="1508760"/>
-            <a:ext cx="310896" cy="310896"/>
-          </a:xfrm>
-          <a:prstGeom prst="ellipse">
-            <a:avLst/>
-          </a:prstGeom>
-          <a:solidFill>
-            <a:srgbClr val="009CD6"/>
-          </a:solidFill>
-          <a:ln>
-            <a:noFill/>
-          </a:ln>
-          <a:effectLst/>
-        </p:spPr>
-        <p:style>
-          <a:lnRef idx="1">
-            <a:schemeClr val="accent1"/>
-          </a:lnRef>
-          <a:fillRef idx="3">
-            <a:schemeClr val="accent1"/>
-          </a:fillRef>
-          <a:effectRef idx="2">
-            <a:schemeClr val="accent1"/>
-          </a:effectRef>
-          <a:fontRef idx="minor">
-            <a:schemeClr val="lt1"/>
-          </a:fontRef>
-        </p:style>
-        <p:txBody>
-          <a:bodyPr rtlCol="0" anchor="ctr" lIns="0" rIns="0" tIns="0" bIns="0" wrap="square"/>
-          <a:lstStyle/>
-          <a:p>
-            <a:pPr algn="ctr"/>
-            <a:r>
-              <a:rPr sz="1300" b="1" i="0">
-                <a:solidFill>
-                  <a:srgbClr val="FFFFFF"/>
-                </a:solidFill>
-                <a:latin typeface="Arial"/>
-              </a:rPr>
-              <a:t>1</a:t>
-            </a:r>
-          </a:p>
-        </p:txBody>
-      </p:sp>
-      <p:sp>
-        <p:nvSpPr>
-          <p:cNvPr id="5" name="TextBox 4"/>
+              <a:t>Filled for PHEQA's registration of institutions</a:t>
+            </a:r>
+          </a:p>
+        </p:txBody>
+      </p:sp>
+      <p:sp>
+        <p:nvSpPr>
+          <p:cNvPr id="4" name="TextBox 3"/>
           <p:cNvSpPr txBox="1"/>
           <p:nvPr/>
         </p:nvSpPr>
         <p:spPr>
           <a:xfrm>
-            <a:off x="1115568" y="1463040"/>
-            <a:ext cx="10527487" cy="739140"/>
+            <a:off x="658368" y="1463040"/>
+            <a:ext cx="10984687" cy="1131570"/>
           </a:xfrm>
           <a:prstGeom prst="rect">
             <a:avLst/>
@@ -22171,26 +21299,26 @@
               </a:spcAft>
             </a:pPr>
             <a:r>
-              <a:rPr sz="1900" b="1" i="0">
+              <a:rPr sz="1750" b="1" i="0">
                 <a:solidFill>
                   <a:srgbClr val="1A1A1A"/>
                 </a:solidFill>
                 <a:latin typeface="Arial"/>
               </a:rPr>
-              <a:t>One goal, written as a story.</a:t>
-            </a:r>
-          </a:p>
-        </p:txBody>
-      </p:sp>
-      <p:sp>
-        <p:nvSpPr>
-          <p:cNvPr id="6" name="Rectangle 5"/>
+              <a:t>The register: an AI assistant extracts it; the supplier's analyst rules on each entry; the Registrar of PHEQA accepts.</a:t>
+            </a:r>
+          </a:p>
+        </p:txBody>
+      </p:sp>
+      <p:sp>
+        <p:nvSpPr>
+          <p:cNvPr id="5" name="Rectangle 4"/>
           <p:cNvSpPr/>
           <p:nvPr/>
         </p:nvSpPr>
         <p:spPr>
           <a:xfrm>
-            <a:off x="621792" y="2206752"/>
+            <a:off x="621792" y="2599182"/>
             <a:ext cx="10881360" cy="12700"/>
           </a:xfrm>
           <a:prstGeom prst="rect">
@@ -22228,67 +21356,14 @@
       </p:sp>
       <p:sp>
         <p:nvSpPr>
-          <p:cNvPr id="7" name="Oval 6"/>
-          <p:cNvSpPr/>
-          <p:nvPr/>
-        </p:nvSpPr>
-        <p:spPr>
-          <a:xfrm>
-            <a:off x="621792" y="2293620"/>
-            <a:ext cx="310896" cy="310896"/>
-          </a:xfrm>
-          <a:prstGeom prst="ellipse">
-            <a:avLst/>
-          </a:prstGeom>
-          <a:solidFill>
-            <a:srgbClr val="009CD6"/>
-          </a:solidFill>
-          <a:ln>
-            <a:noFill/>
-          </a:ln>
-          <a:effectLst/>
-        </p:spPr>
-        <p:style>
-          <a:lnRef idx="1">
-            <a:schemeClr val="accent1"/>
-          </a:lnRef>
-          <a:fillRef idx="3">
-            <a:schemeClr val="accent1"/>
-          </a:fillRef>
-          <a:effectRef idx="2">
-            <a:schemeClr val="accent1"/>
-          </a:effectRef>
-          <a:fontRef idx="minor">
-            <a:schemeClr val="lt1"/>
-          </a:fontRef>
-        </p:style>
-        <p:txBody>
-          <a:bodyPr rtlCol="0" anchor="ctr" lIns="0" rIns="0" tIns="0" bIns="0" wrap="square"/>
-          <a:lstStyle/>
-          <a:p>
-            <a:pPr algn="ctr"/>
-            <a:r>
-              <a:rPr sz="1300" b="1" i="0">
-                <a:solidFill>
-                  <a:srgbClr val="FFFFFF"/>
-                </a:solidFill>
-                <a:latin typeface="Arial"/>
-              </a:rPr>
-              <a:t>2</a:t>
-            </a:r>
-          </a:p>
-        </p:txBody>
-      </p:sp>
-      <p:sp>
-        <p:nvSpPr>
-          <p:cNvPr id="8" name="TextBox 7"/>
+          <p:cNvPr id="6" name="TextBox 5"/>
           <p:cNvSpPr txBox="1"/>
           <p:nvPr/>
         </p:nvSpPr>
         <p:spPr>
           <a:xfrm>
-            <a:off x="1115568" y="2247900"/>
-            <a:ext cx="10527487" cy="739140"/>
+            <a:off x="658368" y="2640330"/>
+            <a:ext cx="10984687" cy="1131570"/>
           </a:xfrm>
           <a:prstGeom prst="rect">
             <a:avLst/>
@@ -22307,26 +21382,26 @@
               </a:spcAft>
             </a:pPr>
             <a:r>
-              <a:rPr sz="1900" b="1" i="0">
+              <a:rPr sz="1750" b="1" i="0">
                 <a:solidFill>
                   <a:srgbClr val="1A1A1A"/>
                 </a:solidFill>
                 <a:latin typeface="Arial"/>
               </a:rPr>
-              <a:t>The screens of that goal.</a:t>
-            </a:r>
-          </a:p>
-        </p:txBody>
-      </p:sp>
-      <p:sp>
-        <p:nvSpPr>
-          <p:cNvPr id="9" name="Rectangle 8"/>
+              <a:t>The screens of a goal: the analyst who wrote the goal; the review of three people decides.</a:t>
+            </a:r>
+          </a:p>
+        </p:txBody>
+      </p:sp>
+      <p:sp>
+        <p:nvSpPr>
+          <p:cNvPr id="7" name="Rectangle 6"/>
           <p:cNvSpPr/>
           <p:nvPr/>
         </p:nvSpPr>
         <p:spPr>
           <a:xfrm>
-            <a:off x="621792" y="2991612"/>
+            <a:off x="621792" y="3776472"/>
             <a:ext cx="10881360" cy="12700"/>
           </a:xfrm>
           <a:prstGeom prst="rect">
@@ -22364,67 +21439,14 @@
       </p:sp>
       <p:sp>
         <p:nvSpPr>
-          <p:cNvPr id="10" name="Oval 9"/>
-          <p:cNvSpPr/>
-          <p:nvPr/>
-        </p:nvSpPr>
-        <p:spPr>
-          <a:xfrm>
-            <a:off x="621792" y="3078480"/>
-            <a:ext cx="310896" cy="310896"/>
-          </a:xfrm>
-          <a:prstGeom prst="ellipse">
-            <a:avLst/>
-          </a:prstGeom>
-          <a:solidFill>
-            <a:srgbClr val="009CD6"/>
-          </a:solidFill>
-          <a:ln>
-            <a:noFill/>
-          </a:ln>
-          <a:effectLst/>
-        </p:spPr>
-        <p:style>
-          <a:lnRef idx="1">
-            <a:schemeClr val="accent1"/>
-          </a:lnRef>
-          <a:fillRef idx="3">
-            <a:schemeClr val="accent1"/>
-          </a:fillRef>
-          <a:effectRef idx="2">
-            <a:schemeClr val="accent1"/>
-          </a:effectRef>
-          <a:fontRef idx="minor">
-            <a:schemeClr val="lt1"/>
-          </a:fontRef>
-        </p:style>
-        <p:txBody>
-          <a:bodyPr rtlCol="0" anchor="ctr" lIns="0" rIns="0" tIns="0" bIns="0" wrap="square"/>
-          <a:lstStyle/>
-          <a:p>
-            <a:pPr algn="ctr"/>
-            <a:r>
-              <a:rPr sz="1300" b="1" i="0">
-                <a:solidFill>
-                  <a:srgbClr val="FFFFFF"/>
-                </a:solidFill>
-                <a:latin typeface="Arial"/>
-              </a:rPr>
-              <a:t>3</a:t>
-            </a:r>
-          </a:p>
-        </p:txBody>
-      </p:sp>
-      <p:sp>
-        <p:nvSpPr>
-          <p:cNvPr id="11" name="TextBox 10"/>
+          <p:cNvPr id="8" name="TextBox 7"/>
           <p:cNvSpPr txBox="1"/>
           <p:nvPr/>
         </p:nvSpPr>
         <p:spPr>
           <a:xfrm>
-            <a:off x="1115568" y="3032760"/>
-            <a:ext cx="10527487" cy="739140"/>
+            <a:off x="658368" y="3817620"/>
+            <a:ext cx="10984687" cy="1131570"/>
           </a:xfrm>
           <a:prstGeom prst="rect">
             <a:avLst/>
@@ -22443,26 +21465,26 @@
               </a:spcAft>
             </a:pPr>
             <a:r>
-              <a:rPr sz="1900" b="1" i="0">
+              <a:rPr sz="1750" b="1" i="0">
                 <a:solidFill>
                   <a:srgbClr val="1A1A1A"/>
                 </a:solidFill>
                 <a:latin typeface="Arial"/>
               </a:rPr>
-              <a:t>The walk-through.</a:t>
-            </a:r>
-          </a:p>
-        </p:txBody>
-      </p:sp>
-      <p:sp>
-        <p:nvSpPr>
-          <p:cNvPr id="12" name="Rectangle 11"/>
+              <a:t>The application model: an AI assistant writes it; the head of the ICT unit approves.</a:t>
+            </a:r>
+          </a:p>
+        </p:txBody>
+      </p:sp>
+      <p:sp>
+        <p:nvSpPr>
+          <p:cNvPr id="9" name="Rectangle 8"/>
           <p:cNvSpPr/>
           <p:nvPr/>
         </p:nvSpPr>
         <p:spPr>
           <a:xfrm>
-            <a:off x="621792" y="3776472"/>
+            <a:off x="621792" y="4953762"/>
             <a:ext cx="10881360" cy="12700"/>
           </a:xfrm>
           <a:prstGeom prst="rect">
@@ -22500,67 +21522,14 @@
       </p:sp>
       <p:sp>
         <p:nvSpPr>
-          <p:cNvPr id="13" name="Oval 12"/>
-          <p:cNvSpPr/>
-          <p:nvPr/>
-        </p:nvSpPr>
-        <p:spPr>
-          <a:xfrm>
-            <a:off x="621792" y="3863340"/>
-            <a:ext cx="310896" cy="310896"/>
-          </a:xfrm>
-          <a:prstGeom prst="ellipse">
-            <a:avLst/>
-          </a:prstGeom>
-          <a:solidFill>
-            <a:srgbClr val="009CD6"/>
-          </a:solidFill>
-          <a:ln>
-            <a:noFill/>
-          </a:ln>
-          <a:effectLst/>
-        </p:spPr>
-        <p:style>
-          <a:lnRef idx="1">
-            <a:schemeClr val="accent1"/>
-          </a:lnRef>
-          <a:fillRef idx="3">
-            <a:schemeClr val="accent1"/>
-          </a:fillRef>
-          <a:effectRef idx="2">
-            <a:schemeClr val="accent1"/>
-          </a:effectRef>
-          <a:fontRef idx="minor">
-            <a:schemeClr val="lt1"/>
-          </a:fontRef>
-        </p:style>
-        <p:txBody>
-          <a:bodyPr rtlCol="0" anchor="ctr" lIns="0" rIns="0" tIns="0" bIns="0" wrap="square"/>
-          <a:lstStyle/>
-          <a:p>
-            <a:pPr algn="ctr"/>
-            <a:r>
-              <a:rPr sz="1300" b="1" i="0">
-                <a:solidFill>
-                  <a:srgbClr val="FFFFFF"/>
-                </a:solidFill>
-                <a:latin typeface="Arial"/>
-              </a:rPr>
-              <a:t>4</a:t>
-            </a:r>
-          </a:p>
-        </p:txBody>
-      </p:sp>
-      <p:sp>
-        <p:nvSpPr>
-          <p:cNvPr id="14" name="TextBox 13"/>
+          <p:cNvPr id="10" name="TextBox 9"/>
           <p:cNvSpPr txBox="1"/>
           <p:nvPr/>
         </p:nvSpPr>
         <p:spPr>
           <a:xfrm>
-            <a:off x="1115568" y="3817620"/>
-            <a:ext cx="10527487" cy="739140"/>
+            <a:off x="658368" y="4994910"/>
+            <a:ext cx="10984687" cy="1131570"/>
           </a:xfrm>
           <a:prstGeom prst="rect">
             <a:avLst/>
@@ -22579,292 +21548,20 @@
               </a:spcAft>
             </a:pPr>
             <a:r>
-              <a:rPr sz="1900" b="1" i="0">
+              <a:rPr sz="1750" b="1" i="0">
                 <a:solidFill>
                   <a:srgbClr val="1A1A1A"/>
                 </a:solidFill>
                 <a:latin typeface="Arial"/>
               </a:rPr>
-              <a:t>The interaction design.</a:t>
-            </a:r>
-          </a:p>
-        </p:txBody>
-      </p:sp>
-      <p:sp>
-        <p:nvSpPr>
-          <p:cNvPr id="15" name="Rectangle 14"/>
-          <p:cNvSpPr/>
-          <p:nvPr/>
-        </p:nvSpPr>
-        <p:spPr>
-          <a:xfrm>
-            <a:off x="621792" y="4561332"/>
-            <a:ext cx="10881360" cy="12700"/>
-          </a:xfrm>
-          <a:prstGeom prst="rect">
-            <a:avLst/>
-          </a:prstGeom>
-          <a:solidFill>
-            <a:srgbClr val="DDECF4"/>
-          </a:solidFill>
-          <a:ln>
-            <a:noFill/>
-          </a:ln>
-          <a:effectLst/>
-        </p:spPr>
-        <p:style>
-          <a:lnRef idx="1">
-            <a:schemeClr val="accent1"/>
-          </a:lnRef>
-          <a:fillRef idx="3">
-            <a:schemeClr val="accent1"/>
-          </a:fillRef>
-          <a:effectRef idx="2">
-            <a:schemeClr val="accent1"/>
-          </a:effectRef>
-          <a:fontRef idx="minor">
-            <a:schemeClr val="lt1"/>
-          </a:fontRef>
-        </p:style>
-        <p:txBody>
-          <a:bodyPr rtlCol="0" anchor="ctr"/>
-          <a:lstStyle/>
-          <a:p>
-            <a:pPr algn="ctr"/>
-          </a:p>
-        </p:txBody>
-      </p:sp>
-      <p:sp>
-        <p:nvSpPr>
-          <p:cNvPr id="16" name="Oval 15"/>
-          <p:cNvSpPr/>
-          <p:nvPr/>
-        </p:nvSpPr>
-        <p:spPr>
-          <a:xfrm>
-            <a:off x="621792" y="4648200"/>
-            <a:ext cx="310896" cy="310896"/>
-          </a:xfrm>
-          <a:prstGeom prst="ellipse">
-            <a:avLst/>
-          </a:prstGeom>
-          <a:solidFill>
-            <a:srgbClr val="009CD6"/>
-          </a:solidFill>
-          <a:ln>
-            <a:noFill/>
-          </a:ln>
-          <a:effectLst/>
-        </p:spPr>
-        <p:style>
-          <a:lnRef idx="1">
-            <a:schemeClr val="accent1"/>
-          </a:lnRef>
-          <a:fillRef idx="3">
-            <a:schemeClr val="accent1"/>
-          </a:fillRef>
-          <a:effectRef idx="2">
-            <a:schemeClr val="accent1"/>
-          </a:effectRef>
-          <a:fontRef idx="minor">
-            <a:schemeClr val="lt1"/>
-          </a:fontRef>
-        </p:style>
-        <p:txBody>
-          <a:bodyPr rtlCol="0" anchor="ctr" lIns="0" rIns="0" tIns="0" bIns="0" wrap="square"/>
-          <a:lstStyle/>
-          <a:p>
-            <a:pPr algn="ctr"/>
-            <a:r>
-              <a:rPr sz="1300" b="1" i="0">
-                <a:solidFill>
-                  <a:srgbClr val="FFFFFF"/>
-                </a:solidFill>
-                <a:latin typeface="Arial"/>
-              </a:rPr>
-              <a:t>5</a:t>
-            </a:r>
-          </a:p>
-        </p:txBody>
-      </p:sp>
-      <p:sp>
-        <p:nvSpPr>
-          <p:cNvPr id="17" name="TextBox 16"/>
-          <p:cNvSpPr txBox="1"/>
-          <p:nvPr/>
-        </p:nvSpPr>
-        <p:spPr>
-          <a:xfrm>
-            <a:off x="1115568" y="4602480"/>
-            <a:ext cx="10527487" cy="739140"/>
-          </a:xfrm>
-          <a:prstGeom prst="rect">
-            <a:avLst/>
-          </a:prstGeom>
-          <a:noFill/>
-        </p:spPr>
-        <p:txBody>
-          <a:bodyPr wrap="square">
-            <a:spAutoFit/>
-          </a:bodyPr>
-          <a:lstStyle/>
-          <a:p>
-            <a:pPr>
-              <a:spcAft>
-                <a:spcPts val="300"/>
-              </a:spcAft>
-            </a:pPr>
-            <a:r>
-              <a:rPr sz="1900" b="1" i="0">
-                <a:solidFill>
-                  <a:srgbClr val="1A1A1A"/>
-                </a:solidFill>
-                <a:latin typeface="Arial"/>
-              </a:rPr>
-              <a:t>The application model: the file a program reads.</a:t>
-            </a:r>
-          </a:p>
-        </p:txBody>
-      </p:sp>
-      <p:sp>
-        <p:nvSpPr>
-          <p:cNvPr id="18" name="Rectangle 17"/>
-          <p:cNvSpPr/>
-          <p:nvPr/>
-        </p:nvSpPr>
-        <p:spPr>
-          <a:xfrm>
-            <a:off x="621792" y="5346192"/>
-            <a:ext cx="10881360" cy="12700"/>
-          </a:xfrm>
-          <a:prstGeom prst="rect">
-            <a:avLst/>
-          </a:prstGeom>
-          <a:solidFill>
-            <a:srgbClr val="DDECF4"/>
-          </a:solidFill>
-          <a:ln>
-            <a:noFill/>
-          </a:ln>
-          <a:effectLst/>
-        </p:spPr>
-        <p:style>
-          <a:lnRef idx="1">
-            <a:schemeClr val="accent1"/>
-          </a:lnRef>
-          <a:fillRef idx="3">
-            <a:schemeClr val="accent1"/>
-          </a:fillRef>
-          <a:effectRef idx="2">
-            <a:schemeClr val="accent1"/>
-          </a:effectRef>
-          <a:fontRef idx="minor">
-            <a:schemeClr val="lt1"/>
-          </a:fontRef>
-        </p:style>
-        <p:txBody>
-          <a:bodyPr rtlCol="0" anchor="ctr"/>
-          <a:lstStyle/>
-          <a:p>
-            <a:pPr algn="ctr"/>
-          </a:p>
-        </p:txBody>
-      </p:sp>
-      <p:sp>
-        <p:nvSpPr>
-          <p:cNvPr id="19" name="Oval 18"/>
-          <p:cNvSpPr/>
-          <p:nvPr/>
-        </p:nvSpPr>
-        <p:spPr>
-          <a:xfrm>
-            <a:off x="621792" y="5433060"/>
-            <a:ext cx="310896" cy="310896"/>
-          </a:xfrm>
-          <a:prstGeom prst="ellipse">
-            <a:avLst/>
-          </a:prstGeom>
-          <a:solidFill>
-            <a:srgbClr val="009CD6"/>
-          </a:solidFill>
-          <a:ln>
-            <a:noFill/>
-          </a:ln>
-          <a:effectLst/>
-        </p:spPr>
-        <p:style>
-          <a:lnRef idx="1">
-            <a:schemeClr val="accent1"/>
-          </a:lnRef>
-          <a:fillRef idx="3">
-            <a:schemeClr val="accent1"/>
-          </a:fillRef>
-          <a:effectRef idx="2">
-            <a:schemeClr val="accent1"/>
-          </a:effectRef>
-          <a:fontRef idx="minor">
-            <a:schemeClr val="lt1"/>
-          </a:fontRef>
-        </p:style>
-        <p:txBody>
-          <a:bodyPr rtlCol="0" anchor="ctr" lIns="0" rIns="0" tIns="0" bIns="0" wrap="square"/>
-          <a:lstStyle/>
-          <a:p>
-            <a:pPr algn="ctr"/>
-            <a:r>
-              <a:rPr sz="1300" b="1" i="0">
-                <a:solidFill>
-                  <a:srgbClr val="FFFFFF"/>
-                </a:solidFill>
-                <a:latin typeface="Arial"/>
-              </a:rPr>
-              <a:t>6</a:t>
-            </a:r>
-          </a:p>
-        </p:txBody>
-      </p:sp>
-      <p:sp>
-        <p:nvSpPr>
-          <p:cNvPr id="20" name="TextBox 19"/>
-          <p:cNvSpPr txBox="1"/>
-          <p:nvPr/>
-        </p:nvSpPr>
-        <p:spPr>
-          <a:xfrm>
-            <a:off x="1115568" y="5387340"/>
-            <a:ext cx="10527487" cy="739140"/>
-          </a:xfrm>
-          <a:prstGeom prst="rect">
-            <a:avLst/>
-          </a:prstGeom>
-          <a:noFill/>
-        </p:spPr>
-        <p:txBody>
-          <a:bodyPr wrap="square">
-            <a:spAutoFit/>
-          </a:bodyPr>
-          <a:lstStyle/>
-          <a:p>
-            <a:pPr>
-              <a:spcAft>
-                <a:spcPts val="300"/>
-              </a:spcAft>
-            </a:pPr>
-            <a:r>
-              <a:rPr sz="1900" b="1" i="0">
-                <a:solidFill>
-                  <a:srgbClr val="1A1A1A"/>
-                </a:solidFill>
-                <a:latin typeface="Arial"/>
-              </a:rPr>
-              <a:t>The working application.</a:t>
-            </a:r>
-          </a:p>
-        </p:txBody>
-      </p:sp>
-      <p:sp>
-        <p:nvSpPr>
-          <p:cNvPr id="21" name="TextBox 20"/>
+              <a:t>The working application: a registration officer finishes a real task on it.</a:t>
+            </a:r>
+          </a:p>
+        </p:txBody>
+      </p:sp>
+      <p:sp>
+        <p:nvSpPr>
+          <p:cNvPr id="11" name="TextBox 10"/>
           <p:cNvSpPr txBox="1"/>
           <p:nvPr/>
         </p:nvSpPr>
@@ -22987,7 +21684,7 @@
                 </a:solidFill>
                 <a:latin typeface="Arial"/>
               </a:rPr>
-              <a:t>Filled for PHEQA's registration of institutions</a:t>
+              <a:t>Nine points where PHEQA says yes</a:t>
             </a:r>
           </a:p>
         </p:txBody>
@@ -23001,7 +21698,7 @@
         <p:spPr>
           <a:xfrm>
             <a:off x="658368" y="1463040"/>
-            <a:ext cx="10984687" cy="1131570"/>
+            <a:ext cx="10984687" cy="1005839"/>
           </a:xfrm>
           <a:prstGeom prst="rect">
             <a:avLst/>
@@ -23020,13 +21717,13 @@
               </a:spcAft>
             </a:pPr>
             <a:r>
-              <a:rPr sz="1750" b="1" i="0">
+              <a:rPr sz="2200" b="1" i="0">
                 <a:solidFill>
                   <a:srgbClr val="1A1A1A"/>
                 </a:solidFill>
                 <a:latin typeface="Arial"/>
               </a:rPr>
-              <a:t>The register: an AI assistant extracts it; the supplier's analyst rules on each entry; the Registrar of PHEQA accepts.</a:t>
+              <a:t>Nine points where a person in PHEQA must say yes before the work goes on.</a:t>
             </a:r>
           </a:p>
         </p:txBody>
@@ -23039,7 +21736,7 @@
         </p:nvSpPr>
         <p:spPr>
           <a:xfrm>
-            <a:off x="621792" y="2599182"/>
+            <a:off x="621792" y="2473452"/>
             <a:ext cx="10881360" cy="12700"/>
           </a:xfrm>
           <a:prstGeom prst="rect">
@@ -23083,8 +21780,8 @@
         </p:nvSpPr>
         <p:spPr>
           <a:xfrm>
-            <a:off x="658368" y="2640330"/>
-            <a:ext cx="10984687" cy="1131570"/>
+            <a:off x="658368" y="2514600"/>
+            <a:ext cx="10984687" cy="1005839"/>
           </a:xfrm>
           <a:prstGeom prst="rect">
             <a:avLst/>
@@ -23103,186 +21800,20 @@
               </a:spcAft>
             </a:pPr>
             <a:r>
-              <a:rPr sz="1750" b="1" i="0">
+              <a:rPr sz="2200" b="1" i="0">
                 <a:solidFill>
                   <a:srgbClr val="1A1A1A"/>
                 </a:solidFill>
                 <a:latin typeface="Arial"/>
               </a:rPr>
-              <a:t>The screens of a goal: the analyst who wrote the goal; the review of three people decides.</a:t>
-            </a:r>
-          </a:p>
-        </p:txBody>
-      </p:sp>
-      <p:sp>
-        <p:nvSpPr>
-          <p:cNvPr id="7" name="Rectangle 6"/>
-          <p:cNvSpPr/>
-          <p:nvPr/>
-        </p:nvSpPr>
-        <p:spPr>
-          <a:xfrm>
-            <a:off x="621792" y="3776472"/>
-            <a:ext cx="10881360" cy="12700"/>
-          </a:xfrm>
-          <a:prstGeom prst="rect">
-            <a:avLst/>
-          </a:prstGeom>
-          <a:solidFill>
-            <a:srgbClr val="DDECF4"/>
-          </a:solidFill>
-          <a:ln>
-            <a:noFill/>
-          </a:ln>
-          <a:effectLst/>
-        </p:spPr>
-        <p:style>
-          <a:lnRef idx="1">
-            <a:schemeClr val="accent1"/>
-          </a:lnRef>
-          <a:fillRef idx="3">
-            <a:schemeClr val="accent1"/>
-          </a:fillRef>
-          <a:effectRef idx="2">
-            <a:schemeClr val="accent1"/>
-          </a:effectRef>
-          <a:fontRef idx="minor">
-            <a:schemeClr val="lt1"/>
-          </a:fontRef>
-        </p:style>
-        <p:txBody>
-          <a:bodyPr rtlCol="0" anchor="ctr"/>
-          <a:lstStyle/>
-          <a:p>
-            <a:pPr algn="ctr"/>
-          </a:p>
-        </p:txBody>
-      </p:sp>
-      <p:sp>
-        <p:nvSpPr>
-          <p:cNvPr id="8" name="TextBox 7"/>
-          <p:cNvSpPr txBox="1"/>
-          <p:nvPr/>
-        </p:nvSpPr>
-        <p:spPr>
-          <a:xfrm>
-            <a:off x="658368" y="3817620"/>
-            <a:ext cx="10984687" cy="1131570"/>
-          </a:xfrm>
-          <a:prstGeom prst="rect">
-            <a:avLst/>
-          </a:prstGeom>
-          <a:noFill/>
-        </p:spPr>
-        <p:txBody>
-          <a:bodyPr wrap="square">
-            <a:spAutoFit/>
-          </a:bodyPr>
-          <a:lstStyle/>
-          <a:p>
-            <a:pPr>
-              <a:spcAft>
-                <a:spcPts val="300"/>
-              </a:spcAft>
-            </a:pPr>
-            <a:r>
-              <a:rPr sz="1750" b="1" i="0">
-                <a:solidFill>
-                  <a:srgbClr val="1A1A1A"/>
-                </a:solidFill>
-                <a:latin typeface="Arial"/>
-              </a:rPr>
-              <a:t>The application model: an AI assistant writes it; the head of the ICT unit approves.</a:t>
-            </a:r>
-          </a:p>
-        </p:txBody>
-      </p:sp>
-      <p:sp>
-        <p:nvSpPr>
-          <p:cNvPr id="9" name="Rectangle 8"/>
-          <p:cNvSpPr/>
-          <p:nvPr/>
-        </p:nvSpPr>
-        <p:spPr>
-          <a:xfrm>
-            <a:off x="621792" y="4953762"/>
-            <a:ext cx="10881360" cy="12700"/>
-          </a:xfrm>
-          <a:prstGeom prst="rect">
-            <a:avLst/>
-          </a:prstGeom>
-          <a:solidFill>
-            <a:srgbClr val="DDECF4"/>
-          </a:solidFill>
-          <a:ln>
-            <a:noFill/>
-          </a:ln>
-          <a:effectLst/>
-        </p:spPr>
-        <p:style>
-          <a:lnRef idx="1">
-            <a:schemeClr val="accent1"/>
-          </a:lnRef>
-          <a:fillRef idx="3">
-            <a:schemeClr val="accent1"/>
-          </a:fillRef>
-          <a:effectRef idx="2">
-            <a:schemeClr val="accent1"/>
-          </a:effectRef>
-          <a:fontRef idx="minor">
-            <a:schemeClr val="lt1"/>
-          </a:fontRef>
-        </p:style>
-        <p:txBody>
-          <a:bodyPr rtlCol="0" anchor="ctr"/>
-          <a:lstStyle/>
-          <a:p>
-            <a:pPr algn="ctr"/>
-          </a:p>
-        </p:txBody>
-      </p:sp>
-      <p:sp>
-        <p:nvSpPr>
-          <p:cNvPr id="10" name="TextBox 9"/>
-          <p:cNvSpPr txBox="1"/>
-          <p:nvPr/>
-        </p:nvSpPr>
-        <p:spPr>
-          <a:xfrm>
-            <a:off x="658368" y="4994910"/>
-            <a:ext cx="10984687" cy="1131570"/>
-          </a:xfrm>
-          <a:prstGeom prst="rect">
-            <a:avLst/>
-          </a:prstGeom>
-          <a:noFill/>
-        </p:spPr>
-        <p:txBody>
-          <a:bodyPr wrap="square">
-            <a:spAutoFit/>
-          </a:bodyPr>
-          <a:lstStyle/>
-          <a:p>
-            <a:pPr>
-              <a:spcAft>
-                <a:spcPts val="300"/>
-              </a:spcAft>
-            </a:pPr>
-            <a:r>
-              <a:rPr sz="1750" b="1" i="0">
-                <a:solidFill>
-                  <a:srgbClr val="1A1A1A"/>
-                </a:solidFill>
-                <a:latin typeface="Arial"/>
-              </a:rPr>
-              <a:t>The working application: a registration officer finishes a real task on it.</a:t>
-            </a:r>
-          </a:p>
-        </p:txBody>
-      </p:sp>
-      <p:sp>
-        <p:nvSpPr>
-          <p:cNvPr id="11" name="TextBox 10"/>
+              <a:t>Two documents written by nobody: the walk-through and the working application.</a:t>
+            </a:r>
+          </a:p>
+        </p:txBody>
+      </p:sp>
+      <p:sp>
+        <p:nvSpPr>
+          <p:cNvPr id="7" name="TextBox 6"/>
           <p:cNvSpPr txBox="1"/>
           <p:nvPr/>
         </p:nvSpPr>
@@ -23334,23 +21865,95 @@
       <p:grpSpPr/>
       <p:sp>
         <p:nvSpPr>
-          <p:cNvPr id="2" name="Rectangle 1"/>
+          <p:cNvPr id="2" name="TextBox 1"/>
+          <p:cNvSpPr txBox="1"/>
+          <p:nvPr/>
+        </p:nvSpPr>
+        <p:spPr>
+          <a:xfrm>
+            <a:off x="1005840" y="2103120"/>
+            <a:ext cx="10149840" cy="2377440"/>
+          </a:xfrm>
+          <a:prstGeom prst="rect">
+            <a:avLst/>
+          </a:prstGeom>
+          <a:noFill/>
+        </p:spPr>
+        <p:txBody>
+          <a:bodyPr wrap="square">
+            <a:spAutoFit/>
+          </a:bodyPr>
+          <a:lstStyle/>
+          <a:p>
+            <a:r>
+              <a:rPr sz="3000" b="1" i="0">
+                <a:solidFill>
+                  <a:srgbClr val="1A1A1A"/>
+                </a:solidFill>
+                <a:latin typeface="Arial"/>
+              </a:rPr>
+              <a:t>Each document has a writer, an input, an output, a person who accepts it and a check, in a fixed order.</a:t>
+            </a:r>
+          </a:p>
+        </p:txBody>
+      </p:sp>
+      <p:sp>
+        <p:nvSpPr>
+          <p:cNvPr id="3" name="TextBox 2"/>
+          <p:cNvSpPr txBox="1"/>
+          <p:nvPr/>
+        </p:nvSpPr>
+        <p:spPr>
+          <a:xfrm>
+            <a:off x="1005840" y="1554480"/>
+            <a:ext cx="5486400" cy="365760"/>
+          </a:xfrm>
+          <a:prstGeom prst="rect">
+            <a:avLst/>
+          </a:prstGeom>
+          <a:noFill/>
+        </p:spPr>
+        <p:txBody>
+          <a:bodyPr wrap="square">
+            <a:spAutoFit/>
+          </a:bodyPr>
+          <a:lstStyle/>
+          <a:p>
+            <a:r>
+              <a:rPr sz="1200" b="1" i="0">
+                <a:solidFill>
+                  <a:srgbClr val="006E96"/>
+                </a:solidFill>
+                <a:latin typeface="Arial"/>
+              </a:rPr>
+              <a:t>IN ONE SENTENCE</a:t>
+            </a:r>
+          </a:p>
+        </p:txBody>
+      </p:sp>
+      <p:sp>
+        <p:nvSpPr>
+          <p:cNvPr id="4" name="Rounded Rectangle 3"/>
           <p:cNvSpPr/>
           <p:nvPr/>
         </p:nvSpPr>
         <p:spPr>
           <a:xfrm>
-            <a:off x="457200" y="384048"/>
-            <a:ext cx="45720" cy="256032"/>
-          </a:xfrm>
-          <a:prstGeom prst="rect">
-            <a:avLst/>
+            <a:off x="658368" y="4709160"/>
+            <a:ext cx="10881360" cy="1554480"/>
+          </a:xfrm>
+          <a:prstGeom prst="roundRect">
+            <a:avLst>
+              <a:gd name="adj" fmla="val 4500"/>
+            </a:avLst>
           </a:prstGeom>
           <a:solidFill>
-            <a:srgbClr val="009CD6"/>
+            <a:srgbClr val="FFFFFF"/>
           </a:solidFill>
-          <a:ln>
-            <a:noFill/>
+          <a:ln w="9525">
+            <a:solidFill>
+              <a:srgbClr val="009CD6"/>
+            </a:solidFill>
           </a:ln>
           <a:effectLst/>
         </p:spPr>
@@ -23369,23 +21972,63 @@
           </a:fontRef>
         </p:style>
         <p:txBody>
-          <a:bodyPr rtlCol="0" anchor="ctr"/>
-          <a:lstStyle/>
-          <a:p>
-            <a:pPr algn="ctr"/>
-          </a:p>
-        </p:txBody>
-      </p:sp>
-      <p:sp>
-        <p:nvSpPr>
-          <p:cNvPr id="3" name="TextBox 2"/>
+          <a:bodyPr rtlCol="0" anchor="ctr" wrap="square" lIns="228600" rIns="228600" tIns="109728" bIns="109728">
+            <a:noAutofit/>
+          </a:bodyPr>
+          <a:lstStyle/>
+          <a:p>
+            <a:pPr algn="l">
+              <a:spcAft>
+                <a:spcPts val="400"/>
+              </a:spcAft>
+            </a:pPr>
+            <a:r>
+              <a:rPr sz="1800" b="1" i="0">
+                <a:solidFill>
+                  <a:srgbClr val="006E96"/>
+                </a:solidFill>
+                <a:latin typeface="Arial"/>
+              </a:rPr>
+              <a:t>Do this on your own sector. </a:t>
+            </a:r>
+            <a:r>
+              <a:rPr sz="1800" b="1" i="0">
+                <a:solidFill>
+                  <a:srgbClr val="1A1A1A"/>
+                </a:solidFill>
+                <a:latin typeface="Arial"/>
+              </a:rPr>
+              <a:t>Map your project's documents onto the twelve.</a:t>
+            </a:r>
+          </a:p>
+          <a:p>
+            <a:pPr algn="l">
+              <a:spcAft>
+                <a:spcPts val="400"/>
+              </a:spcAft>
+            </a:pPr>
+            <a:r>
+              <a:rPr sz="1800" b="0" i="0">
+                <a:solidFill>
+                  <a:srgbClr val="595959"/>
+                </a:solidFill>
+                <a:latin typeface="Arial"/>
+              </a:rPr>
+              <a:t>The prompt in the companion material gives you a map of the project's documents against the twelve, with what is missing, duplicated or out of order. Before the next video.</a:t>
+            </a:r>
+          </a:p>
+        </p:txBody>
+      </p:sp>
+      <p:sp>
+        <p:nvSpPr>
+          <p:cNvPr id="5" name="TextBox 4"/>
           <p:cNvSpPr txBox="1"/>
           <p:nvPr/>
         </p:nvSpPr>
         <p:spPr>
           <a:xfrm>
-            <a:off x="621792" y="274320"/>
-            <a:ext cx="11247120" cy="914400"/>
+            <a:off x="457200" y="6473952"/>
+            <a:ext cx="7772400" cy="292608"/>
           </a:xfrm>
           <a:prstGeom prst="rect">
             <a:avLst/>
@@ -23399,27 +22042,27 @@
           <a:lstStyle/>
           <a:p>
             <a:r>
-              <a:rPr sz="2800" b="1" i="0">
-                <a:solidFill>
-                  <a:srgbClr val="1A1A1A"/>
+              <a:rPr sz="900" b="0" i="0">
+                <a:solidFill>
+                  <a:srgbClr val="595959"/>
                 </a:solidFill>
                 <a:latin typeface="Arial"/>
               </a:rPr>
-              <a:t>Nine points where PHEQA says yes</a:t>
-            </a:r>
-          </a:p>
-        </p:txBody>
-      </p:sp>
-      <p:sp>
-        <p:nvSpPr>
-          <p:cNvPr id="4" name="TextBox 3"/>
+              <a:t>1.4 · Twelve documents from the request to the running service</a:t>
+            </a:r>
+          </a:p>
+        </p:txBody>
+      </p:sp>
+      <p:sp>
+        <p:nvSpPr>
+          <p:cNvPr id="6" name="TextBox 5"/>
           <p:cNvSpPr txBox="1"/>
           <p:nvPr/>
         </p:nvSpPr>
         <p:spPr>
           <a:xfrm>
-            <a:off x="658368" y="1463040"/>
-            <a:ext cx="10984687" cy="1005839"/>
+            <a:off x="10058400" y="6473952"/>
+            <a:ext cx="1673352" cy="292608"/>
           </a:xfrm>
           <a:prstGeom prst="rect">
             <a:avLst/>
@@ -23432,136 +22075,15 @@
           </a:bodyPr>
           <a:lstStyle/>
           <a:p>
-            <a:pPr>
-              <a:spcAft>
-                <a:spcPts val="300"/>
-              </a:spcAft>
-            </a:pPr>
-            <a:r>
-              <a:rPr sz="2200" b="1" i="0">
-                <a:solidFill>
-                  <a:srgbClr val="1A1A1A"/>
+            <a:pPr algn="r"/>
+            <a:r>
+              <a:rPr sz="900" b="0" i="0">
+                <a:solidFill>
+                  <a:srgbClr val="595959"/>
                 </a:solidFill>
                 <a:latin typeface="Arial"/>
               </a:rPr>
-              <a:t>Nine points where a person in PHEQA must say yes before the work goes on.</a:t>
-            </a:r>
-          </a:p>
-        </p:txBody>
-      </p:sp>
-      <p:sp>
-        <p:nvSpPr>
-          <p:cNvPr id="5" name="Rectangle 4"/>
-          <p:cNvSpPr/>
-          <p:nvPr/>
-        </p:nvSpPr>
-        <p:spPr>
-          <a:xfrm>
-            <a:off x="621792" y="2473452"/>
-            <a:ext cx="10881360" cy="12700"/>
-          </a:xfrm>
-          <a:prstGeom prst="rect">
-            <a:avLst/>
-          </a:prstGeom>
-          <a:solidFill>
-            <a:srgbClr val="DDECF4"/>
-          </a:solidFill>
-          <a:ln>
-            <a:noFill/>
-          </a:ln>
-          <a:effectLst/>
-        </p:spPr>
-        <p:style>
-          <a:lnRef idx="1">
-            <a:schemeClr val="accent1"/>
-          </a:lnRef>
-          <a:fillRef idx="3">
-            <a:schemeClr val="accent1"/>
-          </a:fillRef>
-          <a:effectRef idx="2">
-            <a:schemeClr val="accent1"/>
-          </a:effectRef>
-          <a:fontRef idx="minor">
-            <a:schemeClr val="lt1"/>
-          </a:fontRef>
-        </p:style>
-        <p:txBody>
-          <a:bodyPr rtlCol="0" anchor="ctr"/>
-          <a:lstStyle/>
-          <a:p>
-            <a:pPr algn="ctr"/>
-          </a:p>
-        </p:txBody>
-      </p:sp>
-      <p:sp>
-        <p:nvSpPr>
-          <p:cNvPr id="6" name="TextBox 5"/>
-          <p:cNvSpPr txBox="1"/>
-          <p:nvPr/>
-        </p:nvSpPr>
-        <p:spPr>
-          <a:xfrm>
-            <a:off x="658368" y="2514600"/>
-            <a:ext cx="10984687" cy="1005839"/>
-          </a:xfrm>
-          <a:prstGeom prst="rect">
-            <a:avLst/>
-          </a:prstGeom>
-          <a:noFill/>
-        </p:spPr>
-        <p:txBody>
-          <a:bodyPr wrap="square">
-            <a:spAutoFit/>
-          </a:bodyPr>
-          <a:lstStyle/>
-          <a:p>
-            <a:pPr>
-              <a:spcAft>
-                <a:spcPts val="300"/>
-              </a:spcAft>
-            </a:pPr>
-            <a:r>
-              <a:rPr sz="2200" b="1" i="0">
-                <a:solidFill>
-                  <a:srgbClr val="1A1A1A"/>
-                </a:solidFill>
-                <a:latin typeface="Arial"/>
-              </a:rPr>
-              <a:t>Two documents written by nobody: the walk-through and the working application.</a:t>
-            </a:r>
-          </a:p>
-        </p:txBody>
-      </p:sp>
-      <p:sp>
-        <p:nvSpPr>
-          <p:cNvPr id="7" name="TextBox 6"/>
-          <p:cNvSpPr txBox="1"/>
-          <p:nvPr/>
-        </p:nvSpPr>
-        <p:spPr>
-          <a:xfrm>
-            <a:off x="457200" y="6473952"/>
-            <a:ext cx="7772400" cy="292608"/>
-          </a:xfrm>
-          <a:prstGeom prst="rect">
-            <a:avLst/>
-          </a:prstGeom>
-          <a:noFill/>
-        </p:spPr>
-        <p:txBody>
-          <a:bodyPr wrap="square">
-            <a:spAutoFit/>
-          </a:bodyPr>
-          <a:lstStyle/>
-          <a:p>
-            <a:r>
-              <a:rPr sz="900" b="0" i="0">
-                <a:solidFill>
-                  <a:srgbClr val="595959"/>
-                </a:solidFill>
-                <a:latin typeface="Arial"/>
-              </a:rPr>
-              <a:t>1.4 · Twelve documents from the request to the running service</a:t>
+              <a:t>www.itu.int</a:t>
             </a:r>
           </a:p>
         </p:txBody>
@@ -23592,8 +22114,8 @@
         </p:nvSpPr>
         <p:spPr>
           <a:xfrm>
-            <a:off x="1005840" y="2103120"/>
-            <a:ext cx="10149840" cy="2377440"/>
+            <a:off x="822960" y="822960"/>
+            <a:ext cx="7315200" cy="457200"/>
           </a:xfrm>
           <a:prstGeom prst="rect">
             <a:avLst/>
@@ -23607,13 +22129,13 @@
           <a:lstStyle/>
           <a:p>
             <a:r>
-              <a:rPr sz="3000" b="1" i="0">
-                <a:solidFill>
-                  <a:srgbClr val="1A1A1A"/>
+              <a:rPr sz="1200" b="1" i="0">
+                <a:solidFill>
+                  <a:srgbClr val="595959"/>
                 </a:solidFill>
                 <a:latin typeface="Arial"/>
               </a:rPr>
-              <a:t>Each document has a writer, an input, an output, a person who accepts it and a check, in a fixed order.</a:t>
+              <a:t>MODULE 1 · VIDEO 1.5</a:t>
             </a:r>
           </a:p>
         </p:txBody>
@@ -23626,8 +22148,8 @@
         </p:nvSpPr>
         <p:spPr>
           <a:xfrm>
-            <a:off x="1005840" y="1554480"/>
-            <a:ext cx="5486400" cy="365760"/>
+            <a:off x="822960" y="1828800"/>
+            <a:ext cx="2011680" cy="1097280"/>
           </a:xfrm>
           <a:prstGeom prst="rect">
             <a:avLst/>
@@ -23641,101 +22163,47 @@
           <a:lstStyle/>
           <a:p>
             <a:r>
-              <a:rPr sz="1200" b="1" i="0">
-                <a:solidFill>
-                  <a:srgbClr val="006E96"/>
+              <a:rPr sz="6000" b="1" i="0">
+                <a:solidFill>
+                  <a:srgbClr val="009CD6"/>
                 </a:solidFill>
                 <a:latin typeface="Arial"/>
               </a:rPr>
-              <a:t>IN ONE SENTENCE</a:t>
-            </a:r>
-          </a:p>
-        </p:txBody>
-      </p:sp>
-      <p:sp>
-        <p:nvSpPr>
-          <p:cNvPr id="4" name="Rounded Rectangle 3"/>
-          <p:cNvSpPr/>
+              <a:t>1.5</a:t>
+            </a:r>
+          </a:p>
+        </p:txBody>
+      </p:sp>
+      <p:sp>
+        <p:nvSpPr>
+          <p:cNvPr id="4" name="TextBox 3"/>
+          <p:cNvSpPr txBox="1"/>
           <p:nvPr/>
         </p:nvSpPr>
         <p:spPr>
           <a:xfrm>
-            <a:off x="658368" y="4709160"/>
-            <a:ext cx="10881360" cy="1554480"/>
-          </a:xfrm>
-          <a:prstGeom prst="roundRect">
-            <a:avLst>
-              <a:gd name="adj" fmla="val 4500"/>
-            </a:avLst>
-          </a:prstGeom>
-          <a:solidFill>
-            <a:srgbClr val="FFFFFF"/>
-          </a:solidFill>
-          <a:ln w="9525">
-            <a:solidFill>
-              <a:srgbClr val="009CD6"/>
-            </a:solidFill>
-          </a:ln>
-          <a:effectLst/>
-        </p:spPr>
-        <p:style>
-          <a:lnRef idx="1">
-            <a:schemeClr val="accent1"/>
-          </a:lnRef>
-          <a:fillRef idx="3">
-            <a:schemeClr val="accent1"/>
-          </a:fillRef>
-          <a:effectRef idx="2">
-            <a:schemeClr val="accent1"/>
-          </a:effectRef>
-          <a:fontRef idx="minor">
-            <a:schemeClr val="lt1"/>
-          </a:fontRef>
-        </p:style>
-        <p:txBody>
-          <a:bodyPr rtlCol="0" anchor="ctr" wrap="square" lIns="228600" rIns="228600" tIns="109728" bIns="109728">
-            <a:noAutofit/>
+            <a:off x="822960" y="2880360"/>
+            <a:ext cx="9601200" cy="1371600"/>
+          </a:xfrm>
+          <a:prstGeom prst="rect">
+            <a:avLst/>
+          </a:prstGeom>
+          <a:noFill/>
+        </p:spPr>
+        <p:txBody>
+          <a:bodyPr wrap="square">
+            <a:spAutoFit/>
           </a:bodyPr>
           <a:lstStyle/>
           <a:p>
-            <a:pPr algn="l">
-              <a:spcAft>
-                <a:spcPts val="400"/>
-              </a:spcAft>
-            </a:pPr>
-            <a:r>
-              <a:rPr sz="1800" b="1" i="0">
-                <a:solidFill>
-                  <a:srgbClr val="006E96"/>
+            <a:r>
+              <a:rPr sz="3400" b="1" i="0">
+                <a:solidFill>
+                  <a:srgbClr val="1A1A1A"/>
                 </a:solidFill>
                 <a:latin typeface="Arial"/>
               </a:rPr>
-              <a:t>Do this on your own sector. </a:t>
-            </a:r>
-            <a:r>
-              <a:rPr sz="1800" b="1" i="0">
-                <a:solidFill>
-                  <a:srgbClr val="1A1A1A"/>
-                </a:solidFill>
-                <a:latin typeface="Arial"/>
-              </a:rPr>
-              <a:t>Map your project's documents onto the twelve.</a:t>
-            </a:r>
-          </a:p>
-          <a:p>
-            <a:pPr algn="l">
-              <a:spcAft>
-                <a:spcPts val="400"/>
-              </a:spcAft>
-            </a:pPr>
-            <a:r>
-              <a:rPr sz="1800" b="0" i="0">
-                <a:solidFill>
-                  <a:srgbClr val="595959"/>
-                </a:solidFill>
-                <a:latin typeface="Arial"/>
-              </a:rPr>
-              <a:t>The prompt in the companion material gives you a map of the project's documents against the twelve, with what is missing, duplicated or out of order. Before the next video.</a:t>
+              <a:t>Who writes, who checks, who accepts</a:t>
             </a:r>
           </a:p>
         </p:txBody>
@@ -23748,8 +22216,8 @@
         </p:nvSpPr>
         <p:spPr>
           <a:xfrm>
-            <a:off x="457200" y="6473952"/>
-            <a:ext cx="7772400" cy="292608"/>
+            <a:off x="822960" y="4343400"/>
+            <a:ext cx="9875520" cy="1554480"/>
           </a:xfrm>
           <a:prstGeom prst="rect">
             <a:avLst/>
@@ -23763,13 +22231,13 @@
           <a:lstStyle/>
           <a:p>
             <a:r>
-              <a:rPr sz="900" b="0" i="0">
+              <a:rPr sz="1700" b="0" i="1">
                 <a:solidFill>
                   <a:srgbClr val="595959"/>
                 </a:solidFill>
                 <a:latin typeface="Arial"/>
               </a:rPr>
-              <a:t>1.4 · Twelve documents from the request to the running service</a:t>
+              <a:t>The AI assistant may draft; a named person accepts, amends or sets aside each proposal, and only what was accepted stands.</a:t>
             </a:r>
           </a:p>
         </p:txBody>
@@ -23782,8 +22250,8 @@
         </p:nvSpPr>
         <p:spPr>
           <a:xfrm>
-            <a:off x="10058400" y="6473952"/>
-            <a:ext cx="1673352" cy="292608"/>
+            <a:off x="822960" y="5989320"/>
+            <a:ext cx="7315200" cy="365760"/>
           </a:xfrm>
           <a:prstGeom prst="rect">
             <a:avLst/>
@@ -23796,15 +22264,14 @@
           </a:bodyPr>
           <a:lstStyle/>
           <a:p>
-            <a:pPr algn="r"/>
-            <a:r>
-              <a:rPr sz="900" b="0" i="0">
+            <a:r>
+              <a:rPr sz="1200" b="0" i="0">
                 <a:solidFill>
                   <a:srgbClr val="595959"/>
                 </a:solidFill>
                 <a:latin typeface="Arial"/>
               </a:rPr>
-              <a:t>www.itu.int</a:t>
+              <a:t>standalone video · voice-over on text slides</a:t>
             </a:r>
           </a:p>
         </p:txBody>
@@ -23835,8 +22302,8 @@
         </p:nvSpPr>
         <p:spPr>
           <a:xfrm>
-            <a:off x="822960" y="822960"/>
-            <a:ext cx="7315200" cy="457200"/>
+            <a:off x="1005840" y="1325880"/>
+            <a:ext cx="5486400" cy="365760"/>
           </a:xfrm>
           <a:prstGeom prst="rect">
             <a:avLst/>
@@ -23852,11 +22319,11 @@
             <a:r>
               <a:rPr sz="1200" b="1" i="0">
                 <a:solidFill>
-                  <a:srgbClr val="595959"/>
+                  <a:srgbClr val="006E96"/>
                 </a:solidFill>
                 <a:latin typeface="Arial"/>
               </a:rPr>
-              <a:t>MODULE 1 · VIDEO 1.5</a:t>
+              <a:t>WHERE WE START</a:t>
             </a:r>
           </a:p>
         </p:txBody>
@@ -23869,8 +22336,8 @@
         </p:nvSpPr>
         <p:spPr>
           <a:xfrm>
-            <a:off x="822960" y="1828800"/>
-            <a:ext cx="2011680" cy="1097280"/>
+            <a:off x="1005840" y="1783080"/>
+            <a:ext cx="10149840" cy="1737360"/>
           </a:xfrm>
           <a:prstGeom prst="rect">
             <a:avLst/>
@@ -23884,13 +22351,13 @@
           <a:lstStyle/>
           <a:p>
             <a:r>
-              <a:rPr sz="6000" b="1" i="0">
-                <a:solidFill>
-                  <a:srgbClr val="009CD6"/>
+              <a:rPr sz="3000" b="1" i="0">
+                <a:solidFill>
+                  <a:srgbClr val="1A1A1A"/>
                 </a:solidFill>
                 <a:latin typeface="Arial"/>
               </a:rPr>
-              <a:t>1.5</a:t>
+              <a:t>If a machine wrote it, who is answerable for it?</a:t>
             </a:r>
           </a:p>
         </p:txBody>
@@ -23903,8 +22370,8 @@
         </p:nvSpPr>
         <p:spPr>
           <a:xfrm>
-            <a:off x="822960" y="2880360"/>
-            <a:ext cx="9601200" cy="1371600"/>
+            <a:off x="1005840" y="3611880"/>
+            <a:ext cx="10149840" cy="2377440"/>
           </a:xfrm>
           <a:prstGeom prst="rect">
             <a:avLst/>
@@ -23917,14 +22384,35 @@
           </a:bodyPr>
           <a:lstStyle/>
           <a:p>
-            <a:r>
-              <a:rPr sz="3400" b="1" i="0">
-                <a:solidFill>
-                  <a:srgbClr val="1A1A1A"/>
+            <a:pPr>
+              <a:spcAft>
+                <a:spcPts val="800"/>
+              </a:spcAft>
+            </a:pPr>
+            <a:r>
+              <a:rPr sz="1700" b="0" i="0">
+                <a:solidFill>
+                  <a:srgbClr val="595959"/>
                 </a:solidFill>
                 <a:latin typeface="Arial"/>
               </a:rPr>
-              <a:t>Who writes, who checks, who accepts</a:t>
+              <a:t>An AI assistant can draft a register of requirements in an afternoon.</a:t>
+            </a:r>
+          </a:p>
+          <a:p>
+            <a:pPr>
+              <a:spcAft>
+                <a:spcPts val="800"/>
+              </a:spcAft>
+            </a:pPr>
+            <a:r>
+              <a:rPr sz="1700" b="0" i="0">
+                <a:solidFill>
+                  <a:srgbClr val="595959"/>
+                </a:solidFill>
+                <a:latin typeface="Arial"/>
+              </a:rPr>
+              <a:t>That is real help. Your minister will still ask the question.</a:t>
             </a:r>
           </a:p>
         </p:txBody>
@@ -23937,8 +22425,8 @@
         </p:nvSpPr>
         <p:spPr>
           <a:xfrm>
-            <a:off x="822960" y="4343400"/>
-            <a:ext cx="9875520" cy="1554480"/>
+            <a:off x="457200" y="6473952"/>
+            <a:ext cx="7772400" cy="292608"/>
           </a:xfrm>
           <a:prstGeom prst="rect">
             <a:avLst/>
@@ -23952,13 +22440,13 @@
           <a:lstStyle/>
           <a:p>
             <a:r>
-              <a:rPr sz="1700" b="0" i="1">
+              <a:rPr sz="900" b="0" i="0">
                 <a:solidFill>
                   <a:srgbClr val="595959"/>
                 </a:solidFill>
                 <a:latin typeface="Arial"/>
               </a:rPr>
-              <a:t>The AI assistant may draft; a named person accepts, amends or sets aside each proposal, and only what was accepted stands.</a:t>
+              <a:t>1.5 · Who writes, who checks, who accepts</a:t>
             </a:r>
           </a:p>
         </p:txBody>
@@ -23971,8 +22459,8 @@
         </p:nvSpPr>
         <p:spPr>
           <a:xfrm>
-            <a:off x="822960" y="5989320"/>
-            <a:ext cx="7315200" cy="365760"/>
+            <a:off x="10058400" y="6473952"/>
+            <a:ext cx="1673352" cy="292608"/>
           </a:xfrm>
           <a:prstGeom prst="rect">
             <a:avLst/>
@@ -23985,14 +22473,15 @@
           </a:bodyPr>
           <a:lstStyle/>
           <a:p>
-            <a:r>
-              <a:rPr sz="1200" b="0" i="0">
+            <a:pPr algn="r"/>
+            <a:r>
+              <a:rPr sz="900" b="0" i="0">
                 <a:solidFill>
                   <a:srgbClr val="595959"/>
                 </a:solidFill>
                 <a:latin typeface="Arial"/>
               </a:rPr>
-              <a:t>standalone video · voice-over on text slides</a:t>
+              <a:t>www.itu.int</a:t>
             </a:r>
           </a:p>
         </p:txBody>
@@ -24017,14 +22506,58 @@
       <p:grpSpPr/>
       <p:sp>
         <p:nvSpPr>
-          <p:cNvPr id="2" name="TextBox 1"/>
+          <p:cNvPr id="2" name="Rectangle 1"/>
+          <p:cNvSpPr/>
+          <p:nvPr/>
+        </p:nvSpPr>
+        <p:spPr>
+          <a:xfrm>
+            <a:off x="457200" y="384048"/>
+            <a:ext cx="45720" cy="256032"/>
+          </a:xfrm>
+          <a:prstGeom prst="rect">
+            <a:avLst/>
+          </a:prstGeom>
+          <a:solidFill>
+            <a:srgbClr val="009CD6"/>
+          </a:solidFill>
+          <a:ln>
+            <a:noFill/>
+          </a:ln>
+          <a:effectLst/>
+        </p:spPr>
+        <p:style>
+          <a:lnRef idx="1">
+            <a:schemeClr val="accent1"/>
+          </a:lnRef>
+          <a:fillRef idx="3">
+            <a:schemeClr val="accent1"/>
+          </a:fillRef>
+          <a:effectRef idx="2">
+            <a:schemeClr val="accent1"/>
+          </a:effectRef>
+          <a:fontRef idx="minor">
+            <a:schemeClr val="lt1"/>
+          </a:fontRef>
+        </p:style>
+        <p:txBody>
+          <a:bodyPr rtlCol="0" anchor="ctr"/>
+          <a:lstStyle/>
+          <a:p>
+            <a:pPr algn="ctr"/>
+          </a:p>
+        </p:txBody>
+      </p:sp>
+      <p:sp>
+        <p:nvSpPr>
+          <p:cNvPr id="3" name="TextBox 2"/>
           <p:cNvSpPr txBox="1"/>
           <p:nvPr/>
         </p:nvSpPr>
         <p:spPr>
           <a:xfrm>
-            <a:off x="1005840" y="1325880"/>
-            <a:ext cx="5486400" cy="365760"/>
+            <a:off x="621792" y="274320"/>
+            <a:ext cx="11247120" cy="914400"/>
           </a:xfrm>
           <a:prstGeom prst="rect">
             <a:avLst/>
@@ -24038,27 +22571,27 @@
           <a:lstStyle/>
           <a:p>
             <a:r>
-              <a:rPr sz="1200" b="1" i="0">
-                <a:solidFill>
-                  <a:srgbClr val="006E96"/>
+              <a:rPr sz="2800" b="1" i="0">
+                <a:solidFill>
+                  <a:srgbClr val="1A1A1A"/>
                 </a:solidFill>
                 <a:latin typeface="Arial"/>
               </a:rPr>
-              <a:t>WHERE WE START</a:t>
-            </a:r>
-          </a:p>
-        </p:txBody>
-      </p:sp>
-      <p:sp>
-        <p:nvSpPr>
-          <p:cNvPr id="3" name="TextBox 2"/>
+              <a:t>The assistant proposes; a person rules</a:t>
+            </a:r>
+          </a:p>
+        </p:txBody>
+      </p:sp>
+      <p:sp>
+        <p:nvSpPr>
+          <p:cNvPr id="4" name="TextBox 3"/>
           <p:cNvSpPr txBox="1"/>
           <p:nvPr/>
         </p:nvSpPr>
         <p:spPr>
           <a:xfrm>
-            <a:off x="1005840" y="1783080"/>
-            <a:ext cx="10149840" cy="1737360"/>
+            <a:off x="658368" y="1463040"/>
+            <a:ext cx="10984687" cy="1005839"/>
           </a:xfrm>
           <a:prstGeom prst="rect">
             <a:avLst/>
@@ -24071,28 +22604,77 @@
           </a:bodyPr>
           <a:lstStyle/>
           <a:p>
-            <a:r>
-              <a:rPr sz="3000" b="1" i="0">
+            <a:pPr>
+              <a:spcAft>
+                <a:spcPts val="300"/>
+              </a:spcAft>
+            </a:pPr>
+            <a:r>
+              <a:rPr sz="2200" b="1" i="0">
                 <a:solidFill>
                   <a:srgbClr val="1A1A1A"/>
                 </a:solidFill>
                 <a:latin typeface="Arial"/>
               </a:rPr>
-              <a:t>If a machine wrote it, who is answerable for it?</a:t>
-            </a:r>
-          </a:p>
-        </p:txBody>
-      </p:sp>
-      <p:sp>
-        <p:nvSpPr>
-          <p:cNvPr id="4" name="TextBox 3"/>
+              <a:t>For each proposal: accepted, amended or set aside.</a:t>
+            </a:r>
+          </a:p>
+        </p:txBody>
+      </p:sp>
+      <p:sp>
+        <p:nvSpPr>
+          <p:cNvPr id="5" name="Rectangle 4"/>
+          <p:cNvSpPr/>
+          <p:nvPr/>
+        </p:nvSpPr>
+        <p:spPr>
+          <a:xfrm>
+            <a:off x="621792" y="2473452"/>
+            <a:ext cx="10881360" cy="12700"/>
+          </a:xfrm>
+          <a:prstGeom prst="rect">
+            <a:avLst/>
+          </a:prstGeom>
+          <a:solidFill>
+            <a:srgbClr val="DDECF4"/>
+          </a:solidFill>
+          <a:ln>
+            <a:noFill/>
+          </a:ln>
+          <a:effectLst/>
+        </p:spPr>
+        <p:style>
+          <a:lnRef idx="1">
+            <a:schemeClr val="accent1"/>
+          </a:lnRef>
+          <a:fillRef idx="3">
+            <a:schemeClr val="accent1"/>
+          </a:fillRef>
+          <a:effectRef idx="2">
+            <a:schemeClr val="accent1"/>
+          </a:effectRef>
+          <a:fontRef idx="minor">
+            <a:schemeClr val="lt1"/>
+          </a:fontRef>
+        </p:style>
+        <p:txBody>
+          <a:bodyPr rtlCol="0" anchor="ctr"/>
+          <a:lstStyle/>
+          <a:p>
+            <a:pPr algn="ctr"/>
+          </a:p>
+        </p:txBody>
+      </p:sp>
+      <p:sp>
+        <p:nvSpPr>
+          <p:cNvPr id="6" name="TextBox 5"/>
           <p:cNvSpPr txBox="1"/>
           <p:nvPr/>
         </p:nvSpPr>
         <p:spPr>
           <a:xfrm>
-            <a:off x="1005840" y="3611880"/>
-            <a:ext cx="10149840" cy="2377440"/>
+            <a:off x="658368" y="2514600"/>
+            <a:ext cx="10984687" cy="1005839"/>
           </a:xfrm>
           <a:prstGeom prst="rect">
             <a:avLst/>
@@ -24107,40 +22689,24 @@
           <a:p>
             <a:pPr>
               <a:spcAft>
-                <a:spcPts val="800"/>
+                <a:spcPts val="300"/>
               </a:spcAft>
             </a:pPr>
             <a:r>
-              <a:rPr sz="1700" b="0" i="0">
-                <a:solidFill>
-                  <a:srgbClr val="595959"/>
+              <a:rPr sz="2200" b="1" i="0">
+                <a:solidFill>
+                  <a:srgbClr val="1A1A1A"/>
                 </a:solidFill>
                 <a:latin typeface="Arial"/>
               </a:rPr>
-              <a:t>An AI assistant can draft a register of requirements in an afternoon.</a:t>
-            </a:r>
-          </a:p>
-          <a:p>
-            <a:pPr>
-              <a:spcAft>
-                <a:spcPts val="800"/>
-              </a:spcAft>
-            </a:pPr>
-            <a:r>
-              <a:rPr sz="1700" b="0" i="0">
-                <a:solidFill>
-                  <a:srgbClr val="595959"/>
-                </a:solidFill>
-                <a:latin typeface="Arial"/>
-              </a:rPr>
-              <a:t>That is real help. Your minister will still ask the question.</a:t>
-            </a:r>
-          </a:p>
-        </p:txBody>
-      </p:sp>
-      <p:sp>
-        <p:nvSpPr>
-          <p:cNvPr id="5" name="TextBox 4"/>
+              <a:t>The document holds only what was accepted.</a:t>
+            </a:r>
+          </a:p>
+        </p:txBody>
+      </p:sp>
+      <p:sp>
+        <p:nvSpPr>
+          <p:cNvPr id="7" name="TextBox 6"/>
           <p:cNvSpPr txBox="1"/>
           <p:nvPr/>
         </p:nvSpPr>
@@ -24168,41 +22734,6 @@
                 <a:latin typeface="Arial"/>
               </a:rPr>
               <a:t>1.5 · Who writes, who checks, who accepts</a:t>
-            </a:r>
-          </a:p>
-        </p:txBody>
-      </p:sp>
-      <p:sp>
-        <p:nvSpPr>
-          <p:cNvPr id="6" name="TextBox 5"/>
-          <p:cNvSpPr txBox="1"/>
-          <p:nvPr/>
-        </p:nvSpPr>
-        <p:spPr>
-          <a:xfrm>
-            <a:off x="10058400" y="6473952"/>
-            <a:ext cx="1673352" cy="292608"/>
-          </a:xfrm>
-          <a:prstGeom prst="rect">
-            <a:avLst/>
-          </a:prstGeom>
-          <a:noFill/>
-        </p:spPr>
-        <p:txBody>
-          <a:bodyPr wrap="square">
-            <a:spAutoFit/>
-          </a:bodyPr>
-          <a:lstStyle/>
-          <a:p>
-            <a:pPr algn="r"/>
-            <a:r>
-              <a:rPr sz="900" b="0" i="0">
-                <a:solidFill>
-                  <a:srgbClr val="595959"/>
-                </a:solidFill>
-                <a:latin typeface="Arial"/>
-              </a:rPr>
-              <a:t>www.itu.int</a:t>
             </a:r>
           </a:p>
         </p:txBody>
@@ -24298,7 +22829,7 @@
                 </a:solidFill>
                 <a:latin typeface="Arial"/>
               </a:rPr>
-              <a:t>The assistant proposes; a person rules</a:t>
+              <a:t>Where the source is silent, the assistant must say so</a:t>
             </a:r>
           </a:p>
         </p:txBody>
@@ -24337,7 +22868,7 @@
                 </a:solidFill>
                 <a:latin typeface="Arial"/>
               </a:rPr>
-              <a:t>For each proposal: accepted, amended or set aside.</a:t>
+              <a:t>A gap becomes a question with an owner.</a:t>
             </a:r>
           </a:p>
         </p:txBody>
@@ -24420,7 +22951,7 @@
                 </a:solidFill>
                 <a:latin typeface="Arial"/>
               </a:rPr>
-              <a:t>The document holds only what was accepted.</a:t>
+              <a:t>Never a plausible answer.</a:t>
             </a:r>
           </a:p>
         </p:txBody>
@@ -24550,7 +23081,7 @@
                 </a:solidFill>
                 <a:latin typeface="Arial"/>
               </a:rPr>
-              <a:t>Where the source is silent, the assistant must say so</a:t>
+              <a:t>Three roles for every document</a:t>
             </a:r>
           </a:p>
         </p:txBody>
@@ -24589,7 +23120,7 @@
                 </a:solidFill>
                 <a:latin typeface="Arial"/>
               </a:rPr>
-              <a:t>A gap becomes a question with an owner.</a:t>
+              <a:t>Writes. Checks. Accepts.</a:t>
             </a:r>
           </a:p>
         </p:txBody>
@@ -24672,14 +23203,97 @@
                 </a:solidFill>
                 <a:latin typeface="Arial"/>
               </a:rPr>
-              <a:t>Never a plausible answer.</a:t>
-            </a:r>
-          </a:p>
-        </p:txBody>
-      </p:sp>
-      <p:sp>
-        <p:nvSpPr>
-          <p:cNvPr id="7" name="TextBox 6"/>
+              <a:t>The writer never accepts alone.</a:t>
+            </a:r>
+          </a:p>
+        </p:txBody>
+      </p:sp>
+      <p:sp>
+        <p:nvSpPr>
+          <p:cNvPr id="7" name="Rectangle 6"/>
+          <p:cNvSpPr/>
+          <p:nvPr/>
+        </p:nvSpPr>
+        <p:spPr>
+          <a:xfrm>
+            <a:off x="621792" y="3525012"/>
+            <a:ext cx="10881360" cy="12700"/>
+          </a:xfrm>
+          <a:prstGeom prst="rect">
+            <a:avLst/>
+          </a:prstGeom>
+          <a:solidFill>
+            <a:srgbClr val="DDECF4"/>
+          </a:solidFill>
+          <a:ln>
+            <a:noFill/>
+          </a:ln>
+          <a:effectLst/>
+        </p:spPr>
+        <p:style>
+          <a:lnRef idx="1">
+            <a:schemeClr val="accent1"/>
+          </a:lnRef>
+          <a:fillRef idx="3">
+            <a:schemeClr val="accent1"/>
+          </a:fillRef>
+          <a:effectRef idx="2">
+            <a:schemeClr val="accent1"/>
+          </a:effectRef>
+          <a:fontRef idx="minor">
+            <a:schemeClr val="lt1"/>
+          </a:fontRef>
+        </p:style>
+        <p:txBody>
+          <a:bodyPr rtlCol="0" anchor="ctr"/>
+          <a:lstStyle/>
+          <a:p>
+            <a:pPr algn="ctr"/>
+          </a:p>
+        </p:txBody>
+      </p:sp>
+      <p:sp>
+        <p:nvSpPr>
+          <p:cNvPr id="8" name="TextBox 7"/>
+          <p:cNvSpPr txBox="1"/>
+          <p:nvPr/>
+        </p:nvSpPr>
+        <p:spPr>
+          <a:xfrm>
+            <a:off x="658368" y="3566160"/>
+            <a:ext cx="10984687" cy="1005839"/>
+          </a:xfrm>
+          <a:prstGeom prst="rect">
+            <a:avLst/>
+          </a:prstGeom>
+          <a:noFill/>
+        </p:spPr>
+        <p:txBody>
+          <a:bodyPr wrap="square">
+            <a:spAutoFit/>
+          </a:bodyPr>
+          <a:lstStyle/>
+          <a:p>
+            <a:pPr>
+              <a:spcAft>
+                <a:spcPts val="300"/>
+              </a:spcAft>
+            </a:pPr>
+            <a:r>
+              <a:rPr sz="2200" b="1" i="0">
+                <a:solidFill>
+                  <a:srgbClr val="1A1A1A"/>
+                </a:solidFill>
+                <a:latin typeface="Arial"/>
+              </a:rPr>
+              <a:t>The assistant never accepts.</a:t>
+            </a:r>
+          </a:p>
+        </p:txBody>
+      </p:sp>
+      <p:sp>
+        <p:nvSpPr>
+          <p:cNvPr id="9" name="TextBox 8"/>
           <p:cNvSpPr txBox="1"/>
           <p:nvPr/>
         </p:nvSpPr>
@@ -25028,7 +23642,7 @@
                 </a:solidFill>
                 <a:latin typeface="Arial"/>
               </a:rPr>
-              <a:t>Three roles for every document</a:t>
+              <a:t>Where the assistant writes, in PHEQA's project</a:t>
             </a:r>
           </a:p>
         </p:txBody>
@@ -25042,7 +23656,7 @@
         <p:spPr>
           <a:xfrm>
             <a:off x="658368" y="1463040"/>
-            <a:ext cx="10984687" cy="1005839"/>
+            <a:ext cx="10984687" cy="1131570"/>
           </a:xfrm>
           <a:prstGeom prst="rect">
             <a:avLst/>
@@ -25061,13 +23675,13 @@
               </a:spcAft>
             </a:pPr>
             <a:r>
-              <a:rPr sz="2200" b="1" i="0">
+              <a:rPr sz="1750" b="1" i="0">
                 <a:solidFill>
                   <a:srgbClr val="1A1A1A"/>
                 </a:solidFill>
                 <a:latin typeface="Arial"/>
               </a:rPr>
-              <a:t>Writes. Checks. Accepts.</a:t>
+              <a:t>The register: the assistant extracts; the analyst rules; the Registrar accepts.</a:t>
             </a:r>
           </a:p>
         </p:txBody>
@@ -25080,7 +23694,7 @@
         </p:nvSpPr>
         <p:spPr>
           <a:xfrm>
-            <a:off x="621792" y="2473452"/>
+            <a:off x="621792" y="2599182"/>
             <a:ext cx="10881360" cy="12700"/>
           </a:xfrm>
           <a:prstGeom prst="rect">
@@ -25124,8 +23738,8 @@
         </p:nvSpPr>
         <p:spPr>
           <a:xfrm>
-            <a:off x="658368" y="2514600"/>
-            <a:ext cx="10984687" cy="1005839"/>
+            <a:off x="658368" y="2640330"/>
+            <a:ext cx="10984687" cy="1131570"/>
           </a:xfrm>
           <a:prstGeom prst="rect">
             <a:avLst/>
@@ -25144,13 +23758,13 @@
               </a:spcAft>
             </a:pPr>
             <a:r>
-              <a:rPr sz="2200" b="1" i="0">
+              <a:rPr sz="1750" b="1" i="0">
                 <a:solidFill>
                   <a:srgbClr val="1A1A1A"/>
                 </a:solidFill>
                 <a:latin typeface="Arial"/>
               </a:rPr>
-              <a:t>The writer never accepts alone.</a:t>
+              <a:t>The shared settings and lists: the analyst with the assistant; the owner of each setting accepts.</a:t>
             </a:r>
           </a:p>
         </p:txBody>
@@ -25163,7 +23777,7 @@
         </p:nvSpPr>
         <p:spPr>
           <a:xfrm>
-            <a:off x="621792" y="3525012"/>
+            <a:off x="621792" y="3776472"/>
             <a:ext cx="10881360" cy="12700"/>
           </a:xfrm>
           <a:prstGeom prst="rect">
@@ -25207,8 +23821,8 @@
         </p:nvSpPr>
         <p:spPr>
           <a:xfrm>
-            <a:off x="658368" y="3566160"/>
-            <a:ext cx="10984687" cy="1005839"/>
+            <a:off x="658368" y="3817620"/>
+            <a:ext cx="10984687" cy="1131570"/>
           </a:xfrm>
           <a:prstGeom prst="rect">
             <a:avLst/>
@@ -25227,20 +23841,103 @@
               </a:spcAft>
             </a:pPr>
             <a:r>
-              <a:rPr sz="2200" b="1" i="0">
+              <a:rPr sz="1750" b="1" i="0">
                 <a:solidFill>
                   <a:srgbClr val="1A1A1A"/>
                 </a:solidFill>
                 <a:latin typeface="Arial"/>
               </a:rPr>
-              <a:t>The assistant never accepts.</a:t>
-            </a:r>
-          </a:p>
-        </p:txBody>
-      </p:sp>
-      <p:sp>
-        <p:nvSpPr>
-          <p:cNvPr id="9" name="TextBox 8"/>
+              <a:t>One goal as a story: the assistant drafts; the analyst rules; the Registrar accepts at the review.</a:t>
+            </a:r>
+          </a:p>
+        </p:txBody>
+      </p:sp>
+      <p:sp>
+        <p:nvSpPr>
+          <p:cNvPr id="9" name="Rectangle 8"/>
+          <p:cNvSpPr/>
+          <p:nvPr/>
+        </p:nvSpPr>
+        <p:spPr>
+          <a:xfrm>
+            <a:off x="621792" y="4953762"/>
+            <a:ext cx="10881360" cy="12700"/>
+          </a:xfrm>
+          <a:prstGeom prst="rect">
+            <a:avLst/>
+          </a:prstGeom>
+          <a:solidFill>
+            <a:srgbClr val="DDECF4"/>
+          </a:solidFill>
+          <a:ln>
+            <a:noFill/>
+          </a:ln>
+          <a:effectLst/>
+        </p:spPr>
+        <p:style>
+          <a:lnRef idx="1">
+            <a:schemeClr val="accent1"/>
+          </a:lnRef>
+          <a:fillRef idx="3">
+            <a:schemeClr val="accent1"/>
+          </a:fillRef>
+          <a:effectRef idx="2">
+            <a:schemeClr val="accent1"/>
+          </a:effectRef>
+          <a:fontRef idx="minor">
+            <a:schemeClr val="lt1"/>
+          </a:fontRef>
+        </p:style>
+        <p:txBody>
+          <a:bodyPr rtlCol="0" anchor="ctr"/>
+          <a:lstStyle/>
+          <a:p>
+            <a:pPr algn="ctr"/>
+          </a:p>
+        </p:txBody>
+      </p:sp>
+      <p:sp>
+        <p:nvSpPr>
+          <p:cNvPr id="10" name="TextBox 9"/>
+          <p:cNvSpPr txBox="1"/>
+          <p:nvPr/>
+        </p:nvSpPr>
+        <p:spPr>
+          <a:xfrm>
+            <a:off x="658368" y="4994910"/>
+            <a:ext cx="10984687" cy="1131570"/>
+          </a:xfrm>
+          <a:prstGeom prst="rect">
+            <a:avLst/>
+          </a:prstGeom>
+          <a:noFill/>
+        </p:spPr>
+        <p:txBody>
+          <a:bodyPr wrap="square">
+            <a:spAutoFit/>
+          </a:bodyPr>
+          <a:lstStyle/>
+          <a:p>
+            <a:pPr>
+              <a:spcAft>
+                <a:spcPts val="300"/>
+              </a:spcAft>
+            </a:pPr>
+            <a:r>
+              <a:rPr sz="1750" b="1" i="0">
+                <a:solidFill>
+                  <a:srgbClr val="1A1A1A"/>
+                </a:solidFill>
+                <a:latin typeface="Arial"/>
+              </a:rPr>
+              <a:t>The application model: the assistant writes and must refuse to guess; the head of the ICT unit accepts.</a:t>
+            </a:r>
+          </a:p>
+        </p:txBody>
+      </p:sp>
+      <p:sp>
+        <p:nvSpPr>
+          <p:cNvPr id="11" name="TextBox 10"/>
           <p:cNvSpPr txBox="1"/>
           <p:nvPr/>
         </p:nvSpPr>
@@ -25363,21 +24060,74 @@
                 </a:solidFill>
                 <a:latin typeface="Arial"/>
               </a:rPr>
-              <a:t>Where the assistant writes, in PHEQA's project</a:t>
-            </a:r>
-          </a:p>
-        </p:txBody>
-      </p:sp>
-      <p:sp>
-        <p:nvSpPr>
-          <p:cNvPr id="4" name="TextBox 3"/>
+              <a:t>Three checks on the table</a:t>
+            </a:r>
+          </a:p>
+        </p:txBody>
+      </p:sp>
+      <p:sp>
+        <p:nvSpPr>
+          <p:cNvPr id="4" name="Oval 3"/>
+          <p:cNvSpPr/>
+          <p:nvPr/>
+        </p:nvSpPr>
+        <p:spPr>
+          <a:xfrm>
+            <a:off x="621792" y="1508760"/>
+            <a:ext cx="310896" cy="310896"/>
+          </a:xfrm>
+          <a:prstGeom prst="ellipse">
+            <a:avLst/>
+          </a:prstGeom>
+          <a:solidFill>
+            <a:srgbClr val="009CD6"/>
+          </a:solidFill>
+          <a:ln>
+            <a:noFill/>
+          </a:ln>
+          <a:effectLst/>
+        </p:spPr>
+        <p:style>
+          <a:lnRef idx="1">
+            <a:schemeClr val="accent1"/>
+          </a:lnRef>
+          <a:fillRef idx="3">
+            <a:schemeClr val="accent1"/>
+          </a:fillRef>
+          <a:effectRef idx="2">
+            <a:schemeClr val="accent1"/>
+          </a:effectRef>
+          <a:fontRef idx="minor">
+            <a:schemeClr val="lt1"/>
+          </a:fontRef>
+        </p:style>
+        <p:txBody>
+          <a:bodyPr rtlCol="0" anchor="ctr" lIns="0" rIns="0" tIns="0" bIns="0" wrap="square"/>
+          <a:lstStyle/>
+          <a:p>
+            <a:pPr algn="ctr"/>
+            <a:r>
+              <a:rPr sz="1300" b="1" i="0">
+                <a:solidFill>
+                  <a:srgbClr val="FFFFFF"/>
+                </a:solidFill>
+                <a:latin typeface="Arial"/>
+              </a:rPr>
+              <a:t>1</a:t>
+            </a:r>
+          </a:p>
+        </p:txBody>
+      </p:sp>
+      <p:sp>
+        <p:nvSpPr>
+          <p:cNvPr id="5" name="TextBox 4"/>
           <p:cNvSpPr txBox="1"/>
           <p:nvPr/>
         </p:nvSpPr>
         <p:spPr>
           <a:xfrm>
-            <a:off x="658368" y="1463040"/>
-            <a:ext cx="10984687" cy="1131570"/>
+            <a:off x="1115568" y="1463040"/>
+            <a:ext cx="10527487" cy="1005839"/>
           </a:xfrm>
           <a:prstGeom prst="rect">
             <a:avLst/>
@@ -25396,26 +24146,26 @@
               </a:spcAft>
             </a:pPr>
             <a:r>
-              <a:rPr sz="1750" b="1" i="0">
+              <a:rPr sz="2200" b="1" i="0">
                 <a:solidFill>
                   <a:srgbClr val="1A1A1A"/>
                 </a:solidFill>
                 <a:latin typeface="Arial"/>
               </a:rPr>
-              <a:t>The register: the assistant extracts; the analyst rules; the Registrar accepts.</a:t>
-            </a:r>
-          </a:p>
-        </p:txBody>
-      </p:sp>
-      <p:sp>
-        <p:nvSpPr>
-          <p:cNvPr id="5" name="Rectangle 4"/>
+              <a:t>No row ends with the assistant.</a:t>
+            </a:r>
+          </a:p>
+        </p:txBody>
+      </p:sp>
+      <p:sp>
+        <p:nvSpPr>
+          <p:cNvPr id="6" name="Rectangle 5"/>
           <p:cNvSpPr/>
           <p:nvPr/>
         </p:nvSpPr>
         <p:spPr>
           <a:xfrm>
-            <a:off x="621792" y="2599182"/>
+            <a:off x="621792" y="2473452"/>
             <a:ext cx="10881360" cy="12700"/>
           </a:xfrm>
           <a:prstGeom prst="rect">
@@ -25453,14 +24203,67 @@
       </p:sp>
       <p:sp>
         <p:nvSpPr>
-          <p:cNvPr id="6" name="TextBox 5"/>
+          <p:cNvPr id="7" name="Oval 6"/>
+          <p:cNvSpPr/>
+          <p:nvPr/>
+        </p:nvSpPr>
+        <p:spPr>
+          <a:xfrm>
+            <a:off x="621792" y="2560320"/>
+            <a:ext cx="310896" cy="310896"/>
+          </a:xfrm>
+          <a:prstGeom prst="ellipse">
+            <a:avLst/>
+          </a:prstGeom>
+          <a:solidFill>
+            <a:srgbClr val="009CD6"/>
+          </a:solidFill>
+          <a:ln>
+            <a:noFill/>
+          </a:ln>
+          <a:effectLst/>
+        </p:spPr>
+        <p:style>
+          <a:lnRef idx="1">
+            <a:schemeClr val="accent1"/>
+          </a:lnRef>
+          <a:fillRef idx="3">
+            <a:schemeClr val="accent1"/>
+          </a:fillRef>
+          <a:effectRef idx="2">
+            <a:schemeClr val="accent1"/>
+          </a:effectRef>
+          <a:fontRef idx="minor">
+            <a:schemeClr val="lt1"/>
+          </a:fontRef>
+        </p:style>
+        <p:txBody>
+          <a:bodyPr rtlCol="0" anchor="ctr" lIns="0" rIns="0" tIns="0" bIns="0" wrap="square"/>
+          <a:lstStyle/>
+          <a:p>
+            <a:pPr algn="ctr"/>
+            <a:r>
+              <a:rPr sz="1300" b="1" i="0">
+                <a:solidFill>
+                  <a:srgbClr val="FFFFFF"/>
+                </a:solidFill>
+                <a:latin typeface="Arial"/>
+              </a:rPr>
+              <a:t>2</a:t>
+            </a:r>
+          </a:p>
+        </p:txBody>
+      </p:sp>
+      <p:sp>
+        <p:nvSpPr>
+          <p:cNvPr id="8" name="TextBox 7"/>
           <p:cNvSpPr txBox="1"/>
           <p:nvPr/>
         </p:nvSpPr>
         <p:spPr>
           <a:xfrm>
-            <a:off x="658368" y="2640330"/>
-            <a:ext cx="10984687" cy="1131570"/>
+            <a:off x="1115568" y="2514600"/>
+            <a:ext cx="10527487" cy="1005839"/>
           </a:xfrm>
           <a:prstGeom prst="rect">
             <a:avLst/>
@@ -25479,26 +24282,26 @@
               </a:spcAft>
             </a:pPr>
             <a:r>
-              <a:rPr sz="1750" b="1" i="0">
+              <a:rPr sz="2200" b="1" i="0">
                 <a:solidFill>
                   <a:srgbClr val="1A1A1A"/>
                 </a:solidFill>
                 <a:latin typeface="Arial"/>
               </a:rPr>
-              <a:t>The shared settings and lists: the analyst with the assistant; the owner of each setting accepts.</a:t>
-            </a:r>
-          </a:p>
-        </p:txBody>
-      </p:sp>
-      <p:sp>
-        <p:nvSpPr>
-          <p:cNvPr id="7" name="Rectangle 6"/>
+              <a:t>The writer never accepts alone.</a:t>
+            </a:r>
+          </a:p>
+        </p:txBody>
+      </p:sp>
+      <p:sp>
+        <p:nvSpPr>
+          <p:cNvPr id="9" name="Rectangle 8"/>
           <p:cNvSpPr/>
           <p:nvPr/>
         </p:nvSpPr>
         <p:spPr>
           <a:xfrm>
-            <a:off x="621792" y="3776472"/>
+            <a:off x="621792" y="3525012"/>
             <a:ext cx="10881360" cy="12700"/>
           </a:xfrm>
           <a:prstGeom prst="rect">
@@ -25536,14 +24339,67 @@
       </p:sp>
       <p:sp>
         <p:nvSpPr>
-          <p:cNvPr id="8" name="TextBox 7"/>
+          <p:cNvPr id="10" name="Oval 9"/>
+          <p:cNvSpPr/>
+          <p:nvPr/>
+        </p:nvSpPr>
+        <p:spPr>
+          <a:xfrm>
+            <a:off x="621792" y="3611879"/>
+            <a:ext cx="310896" cy="310896"/>
+          </a:xfrm>
+          <a:prstGeom prst="ellipse">
+            <a:avLst/>
+          </a:prstGeom>
+          <a:solidFill>
+            <a:srgbClr val="009CD6"/>
+          </a:solidFill>
+          <a:ln>
+            <a:noFill/>
+          </a:ln>
+          <a:effectLst/>
+        </p:spPr>
+        <p:style>
+          <a:lnRef idx="1">
+            <a:schemeClr val="accent1"/>
+          </a:lnRef>
+          <a:fillRef idx="3">
+            <a:schemeClr val="accent1"/>
+          </a:fillRef>
+          <a:effectRef idx="2">
+            <a:schemeClr val="accent1"/>
+          </a:effectRef>
+          <a:fontRef idx="minor">
+            <a:schemeClr val="lt1"/>
+          </a:fontRef>
+        </p:style>
+        <p:txBody>
+          <a:bodyPr rtlCol="0" anchor="ctr" lIns="0" rIns="0" tIns="0" bIns="0" wrap="square"/>
+          <a:lstStyle/>
+          <a:p>
+            <a:pPr algn="ctr"/>
+            <a:r>
+              <a:rPr sz="1300" b="1" i="0">
+                <a:solidFill>
+                  <a:srgbClr val="FFFFFF"/>
+                </a:solidFill>
+                <a:latin typeface="Arial"/>
+              </a:rPr>
+              <a:t>3</a:t>
+            </a:r>
+          </a:p>
+        </p:txBody>
+      </p:sp>
+      <p:sp>
+        <p:nvSpPr>
+          <p:cNvPr id="11" name="TextBox 10"/>
           <p:cNvSpPr txBox="1"/>
           <p:nvPr/>
         </p:nvSpPr>
         <p:spPr>
           <a:xfrm>
-            <a:off x="658368" y="3817620"/>
-            <a:ext cx="10984687" cy="1131570"/>
+            <a:off x="1115568" y="3566160"/>
+            <a:ext cx="10527487" cy="1005839"/>
           </a:xfrm>
           <a:prstGeom prst="rect">
             <a:avLst/>
@@ -25562,103 +24418,20 @@
               </a:spcAft>
             </a:pPr>
             <a:r>
-              <a:rPr sz="1750" b="1" i="0">
+              <a:rPr sz="2200" b="1" i="0">
                 <a:solidFill>
                   <a:srgbClr val="1A1A1A"/>
                 </a:solidFill>
                 <a:latin typeface="Arial"/>
               </a:rPr>
-              <a:t>One goal as a story: the assistant drafts; the analyst rules; the Registrar accepts at the review.</a:t>
-            </a:r>
-          </a:p>
-        </p:txBody>
-      </p:sp>
-      <p:sp>
-        <p:nvSpPr>
-          <p:cNvPr id="9" name="Rectangle 8"/>
-          <p:cNvSpPr/>
-          <p:nvPr/>
-        </p:nvSpPr>
-        <p:spPr>
-          <a:xfrm>
-            <a:off x="621792" y="4953762"/>
-            <a:ext cx="10881360" cy="12700"/>
-          </a:xfrm>
-          <a:prstGeom prst="rect">
-            <a:avLst/>
-          </a:prstGeom>
-          <a:solidFill>
-            <a:srgbClr val="DDECF4"/>
-          </a:solidFill>
-          <a:ln>
-            <a:noFill/>
-          </a:ln>
-          <a:effectLst/>
-        </p:spPr>
-        <p:style>
-          <a:lnRef idx="1">
-            <a:schemeClr val="accent1"/>
-          </a:lnRef>
-          <a:fillRef idx="3">
-            <a:schemeClr val="accent1"/>
-          </a:fillRef>
-          <a:effectRef idx="2">
-            <a:schemeClr val="accent1"/>
-          </a:effectRef>
-          <a:fontRef idx="minor">
-            <a:schemeClr val="lt1"/>
-          </a:fontRef>
-        </p:style>
-        <p:txBody>
-          <a:bodyPr rtlCol="0" anchor="ctr"/>
-          <a:lstStyle/>
-          <a:p>
-            <a:pPr algn="ctr"/>
-          </a:p>
-        </p:txBody>
-      </p:sp>
-      <p:sp>
-        <p:nvSpPr>
-          <p:cNvPr id="10" name="TextBox 9"/>
-          <p:cNvSpPr txBox="1"/>
-          <p:nvPr/>
-        </p:nvSpPr>
-        <p:spPr>
-          <a:xfrm>
-            <a:off x="658368" y="4994910"/>
-            <a:ext cx="10984687" cy="1131570"/>
-          </a:xfrm>
-          <a:prstGeom prst="rect">
-            <a:avLst/>
-          </a:prstGeom>
-          <a:noFill/>
-        </p:spPr>
-        <p:txBody>
-          <a:bodyPr wrap="square">
-            <a:spAutoFit/>
-          </a:bodyPr>
-          <a:lstStyle/>
-          <a:p>
-            <a:pPr>
-              <a:spcAft>
-                <a:spcPts val="300"/>
-              </a:spcAft>
-            </a:pPr>
-            <a:r>
-              <a:rPr sz="1750" b="1" i="0">
-                <a:solidFill>
-                  <a:srgbClr val="1A1A1A"/>
-                </a:solidFill>
-                <a:latin typeface="Arial"/>
-              </a:rPr>
-              <a:t>The application model: the assistant writes and must refuse to guess; the head of the ICT unit accepts.</a:t>
-            </a:r>
-          </a:p>
-        </p:txBody>
-      </p:sp>
-      <p:sp>
-        <p:nvSpPr>
-          <p:cNvPr id="11" name="TextBox 10"/>
+              <a:t>The person who will live with it is in the room.</a:t>
+            </a:r>
+          </a:p>
+        </p:txBody>
+      </p:sp>
+      <p:sp>
+        <p:nvSpPr>
+          <p:cNvPr id="12" name="TextBox 11"/>
           <p:cNvSpPr txBox="1"/>
           <p:nvPr/>
         </p:nvSpPr>
@@ -25710,23 +24483,95 @@
       <p:grpSpPr/>
       <p:sp>
         <p:nvSpPr>
-          <p:cNvPr id="2" name="Rectangle 1"/>
+          <p:cNvPr id="2" name="TextBox 1"/>
+          <p:cNvSpPr txBox="1"/>
+          <p:nvPr/>
+        </p:nvSpPr>
+        <p:spPr>
+          <a:xfrm>
+            <a:off x="1005840" y="2103120"/>
+            <a:ext cx="10149840" cy="2377440"/>
+          </a:xfrm>
+          <a:prstGeom prst="rect">
+            <a:avLst/>
+          </a:prstGeom>
+          <a:noFill/>
+        </p:spPr>
+        <p:txBody>
+          <a:bodyPr wrap="square">
+            <a:spAutoFit/>
+          </a:bodyPr>
+          <a:lstStyle/>
+          <a:p>
+            <a:r>
+              <a:rPr sz="3000" b="1" i="0">
+                <a:solidFill>
+                  <a:srgbClr val="1A1A1A"/>
+                </a:solidFill>
+                <a:latin typeface="Arial"/>
+              </a:rPr>
+              <a:t>The AI assistant may draft; a named person accepts, amends or sets aside each proposal, and only what was accepted stands.</a:t>
+            </a:r>
+          </a:p>
+        </p:txBody>
+      </p:sp>
+      <p:sp>
+        <p:nvSpPr>
+          <p:cNvPr id="3" name="TextBox 2"/>
+          <p:cNvSpPr txBox="1"/>
+          <p:nvPr/>
+        </p:nvSpPr>
+        <p:spPr>
+          <a:xfrm>
+            <a:off x="1005840" y="1554480"/>
+            <a:ext cx="5486400" cy="365760"/>
+          </a:xfrm>
+          <a:prstGeom prst="rect">
+            <a:avLst/>
+          </a:prstGeom>
+          <a:noFill/>
+        </p:spPr>
+        <p:txBody>
+          <a:bodyPr wrap="square">
+            <a:spAutoFit/>
+          </a:bodyPr>
+          <a:lstStyle/>
+          <a:p>
+            <a:r>
+              <a:rPr sz="1200" b="1" i="0">
+                <a:solidFill>
+                  <a:srgbClr val="006E96"/>
+                </a:solidFill>
+                <a:latin typeface="Arial"/>
+              </a:rPr>
+              <a:t>IN ONE SENTENCE</a:t>
+            </a:r>
+          </a:p>
+        </p:txBody>
+      </p:sp>
+      <p:sp>
+        <p:nvSpPr>
+          <p:cNvPr id="4" name="Rounded Rectangle 3"/>
           <p:cNvSpPr/>
           <p:nvPr/>
         </p:nvSpPr>
         <p:spPr>
           <a:xfrm>
-            <a:off x="457200" y="384048"/>
-            <a:ext cx="45720" cy="256032"/>
-          </a:xfrm>
-          <a:prstGeom prst="rect">
-            <a:avLst/>
+            <a:off x="658368" y="4709160"/>
+            <a:ext cx="10881360" cy="1554480"/>
+          </a:xfrm>
+          <a:prstGeom prst="roundRect">
+            <a:avLst>
+              <a:gd name="adj" fmla="val 4500"/>
+            </a:avLst>
           </a:prstGeom>
           <a:solidFill>
-            <a:srgbClr val="009CD6"/>
+            <a:srgbClr val="FFFFFF"/>
           </a:solidFill>
-          <a:ln>
-            <a:noFill/>
+          <a:ln w="9525">
+            <a:solidFill>
+              <a:srgbClr val="009CD6"/>
+            </a:solidFill>
           </a:ln>
           <a:effectLst/>
         </p:spPr>
@@ -25745,23 +24590,63 @@
           </a:fontRef>
         </p:style>
         <p:txBody>
-          <a:bodyPr rtlCol="0" anchor="ctr"/>
-          <a:lstStyle/>
-          <a:p>
-            <a:pPr algn="ctr"/>
-          </a:p>
-        </p:txBody>
-      </p:sp>
-      <p:sp>
-        <p:nvSpPr>
-          <p:cNvPr id="3" name="TextBox 2"/>
+          <a:bodyPr rtlCol="0" anchor="ctr" wrap="square" lIns="228600" rIns="228600" tIns="109728" bIns="109728">
+            <a:noAutofit/>
+          </a:bodyPr>
+          <a:lstStyle/>
+          <a:p>
+            <a:pPr algn="l">
+              <a:spcAft>
+                <a:spcPts val="400"/>
+              </a:spcAft>
+            </a:pPr>
+            <a:r>
+              <a:rPr sz="1800" b="1" i="0">
+                <a:solidFill>
+                  <a:srgbClr val="006E96"/>
+                </a:solidFill>
+                <a:latin typeface="Arial"/>
+              </a:rPr>
+              <a:t>Do this on your own sector. </a:t>
+            </a:r>
+            <a:r>
+              <a:rPr sz="1800" b="1" i="0">
+                <a:solidFill>
+                  <a:srgbClr val="1A1A1A"/>
+                </a:solidFill>
+                <a:latin typeface="Arial"/>
+              </a:rPr>
+              <a:t>Draft who writes, checks and accepts each document.</a:t>
+            </a:r>
+          </a:p>
+          <a:p>
+            <a:pPr algn="l">
+              <a:spcAft>
+                <a:spcPts val="400"/>
+              </a:spcAft>
+            </a:pPr>
+            <a:r>
+              <a:rPr sz="1800" b="0" i="0">
+                <a:solidFill>
+                  <a:srgbClr val="595959"/>
+                </a:solidFill>
+                <a:latin typeface="Arial"/>
+              </a:rPr>
+              <a:t>The prompt in the companion material gives you a table of who writes, checks and accepts each of the twelve documents for your project team. Before the next video.</a:t>
+            </a:r>
+          </a:p>
+        </p:txBody>
+      </p:sp>
+      <p:sp>
+        <p:nvSpPr>
+          <p:cNvPr id="5" name="TextBox 4"/>
           <p:cNvSpPr txBox="1"/>
           <p:nvPr/>
         </p:nvSpPr>
         <p:spPr>
           <a:xfrm>
-            <a:off x="621792" y="274320"/>
-            <a:ext cx="11247120" cy="914400"/>
+            <a:off x="457200" y="6473952"/>
+            <a:ext cx="7772400" cy="292608"/>
           </a:xfrm>
           <a:prstGeom prst="rect">
             <a:avLst/>
@@ -25775,80 +24660,27 @@
           <a:lstStyle/>
           <a:p>
             <a:r>
-              <a:rPr sz="2800" b="1" i="0">
-                <a:solidFill>
-                  <a:srgbClr val="1A1A1A"/>
+              <a:rPr sz="900" b="0" i="0">
+                <a:solidFill>
+                  <a:srgbClr val="595959"/>
                 </a:solidFill>
                 <a:latin typeface="Arial"/>
               </a:rPr>
-              <a:t>Three checks on the table</a:t>
-            </a:r>
-          </a:p>
-        </p:txBody>
-      </p:sp>
-      <p:sp>
-        <p:nvSpPr>
-          <p:cNvPr id="4" name="Oval 3"/>
-          <p:cNvSpPr/>
-          <p:nvPr/>
-        </p:nvSpPr>
-        <p:spPr>
-          <a:xfrm>
-            <a:off x="621792" y="1508760"/>
-            <a:ext cx="310896" cy="310896"/>
-          </a:xfrm>
-          <a:prstGeom prst="ellipse">
-            <a:avLst/>
-          </a:prstGeom>
-          <a:solidFill>
-            <a:srgbClr val="009CD6"/>
-          </a:solidFill>
-          <a:ln>
-            <a:noFill/>
-          </a:ln>
-          <a:effectLst/>
-        </p:spPr>
-        <p:style>
-          <a:lnRef idx="1">
-            <a:schemeClr val="accent1"/>
-          </a:lnRef>
-          <a:fillRef idx="3">
-            <a:schemeClr val="accent1"/>
-          </a:fillRef>
-          <a:effectRef idx="2">
-            <a:schemeClr val="accent1"/>
-          </a:effectRef>
-          <a:fontRef idx="minor">
-            <a:schemeClr val="lt1"/>
-          </a:fontRef>
-        </p:style>
-        <p:txBody>
-          <a:bodyPr rtlCol="0" anchor="ctr" lIns="0" rIns="0" tIns="0" bIns="0" wrap="square"/>
-          <a:lstStyle/>
-          <a:p>
-            <a:pPr algn="ctr"/>
-            <a:r>
-              <a:rPr sz="1300" b="1" i="0">
-                <a:solidFill>
-                  <a:srgbClr val="FFFFFF"/>
-                </a:solidFill>
-                <a:latin typeface="Arial"/>
-              </a:rPr>
-              <a:t>1</a:t>
-            </a:r>
-          </a:p>
-        </p:txBody>
-      </p:sp>
-      <p:sp>
-        <p:nvSpPr>
-          <p:cNvPr id="5" name="TextBox 4"/>
+              <a:t>1.5 · Who writes, who checks, who accepts</a:t>
+            </a:r>
+          </a:p>
+        </p:txBody>
+      </p:sp>
+      <p:sp>
+        <p:nvSpPr>
+          <p:cNvPr id="6" name="TextBox 5"/>
           <p:cNvSpPr txBox="1"/>
           <p:nvPr/>
         </p:nvSpPr>
         <p:spPr>
           <a:xfrm>
-            <a:off x="1115568" y="1463040"/>
-            <a:ext cx="10527487" cy="1005839"/>
+            <a:off x="10058400" y="6473952"/>
+            <a:ext cx="1673352" cy="292608"/>
           </a:xfrm>
           <a:prstGeom prst="rect">
             <a:avLst/>
@@ -25861,325 +24693,15 @@
           </a:bodyPr>
           <a:lstStyle/>
           <a:p>
-            <a:pPr>
-              <a:spcAft>
-                <a:spcPts val="300"/>
-              </a:spcAft>
-            </a:pPr>
-            <a:r>
-              <a:rPr sz="2200" b="1" i="0">
-                <a:solidFill>
-                  <a:srgbClr val="1A1A1A"/>
+            <a:pPr algn="r"/>
+            <a:r>
+              <a:rPr sz="900" b="0" i="0">
+                <a:solidFill>
+                  <a:srgbClr val="595959"/>
                 </a:solidFill>
                 <a:latin typeface="Arial"/>
               </a:rPr>
-              <a:t>No row ends with the assistant.</a:t>
-            </a:r>
-          </a:p>
-        </p:txBody>
-      </p:sp>
-      <p:sp>
-        <p:nvSpPr>
-          <p:cNvPr id="6" name="Rectangle 5"/>
-          <p:cNvSpPr/>
-          <p:nvPr/>
-        </p:nvSpPr>
-        <p:spPr>
-          <a:xfrm>
-            <a:off x="621792" y="2473452"/>
-            <a:ext cx="10881360" cy="12700"/>
-          </a:xfrm>
-          <a:prstGeom prst="rect">
-            <a:avLst/>
-          </a:prstGeom>
-          <a:solidFill>
-            <a:srgbClr val="DDECF4"/>
-          </a:solidFill>
-          <a:ln>
-            <a:noFill/>
-          </a:ln>
-          <a:effectLst/>
-        </p:spPr>
-        <p:style>
-          <a:lnRef idx="1">
-            <a:schemeClr val="accent1"/>
-          </a:lnRef>
-          <a:fillRef idx="3">
-            <a:schemeClr val="accent1"/>
-          </a:fillRef>
-          <a:effectRef idx="2">
-            <a:schemeClr val="accent1"/>
-          </a:effectRef>
-          <a:fontRef idx="minor">
-            <a:schemeClr val="lt1"/>
-          </a:fontRef>
-        </p:style>
-        <p:txBody>
-          <a:bodyPr rtlCol="0" anchor="ctr"/>
-          <a:lstStyle/>
-          <a:p>
-            <a:pPr algn="ctr"/>
-          </a:p>
-        </p:txBody>
-      </p:sp>
-      <p:sp>
-        <p:nvSpPr>
-          <p:cNvPr id="7" name="Oval 6"/>
-          <p:cNvSpPr/>
-          <p:nvPr/>
-        </p:nvSpPr>
-        <p:spPr>
-          <a:xfrm>
-            <a:off x="621792" y="2560320"/>
-            <a:ext cx="310896" cy="310896"/>
-          </a:xfrm>
-          <a:prstGeom prst="ellipse">
-            <a:avLst/>
-          </a:prstGeom>
-          <a:solidFill>
-            <a:srgbClr val="009CD6"/>
-          </a:solidFill>
-          <a:ln>
-            <a:noFill/>
-          </a:ln>
-          <a:effectLst/>
-        </p:spPr>
-        <p:style>
-          <a:lnRef idx="1">
-            <a:schemeClr val="accent1"/>
-          </a:lnRef>
-          <a:fillRef idx="3">
-            <a:schemeClr val="accent1"/>
-          </a:fillRef>
-          <a:effectRef idx="2">
-            <a:schemeClr val="accent1"/>
-          </a:effectRef>
-          <a:fontRef idx="minor">
-            <a:schemeClr val="lt1"/>
-          </a:fontRef>
-        </p:style>
-        <p:txBody>
-          <a:bodyPr rtlCol="0" anchor="ctr" lIns="0" rIns="0" tIns="0" bIns="0" wrap="square"/>
-          <a:lstStyle/>
-          <a:p>
-            <a:pPr algn="ctr"/>
-            <a:r>
-              <a:rPr sz="1300" b="1" i="0">
-                <a:solidFill>
-                  <a:srgbClr val="FFFFFF"/>
-                </a:solidFill>
-                <a:latin typeface="Arial"/>
-              </a:rPr>
-              <a:t>2</a:t>
-            </a:r>
-          </a:p>
-        </p:txBody>
-      </p:sp>
-      <p:sp>
-        <p:nvSpPr>
-          <p:cNvPr id="8" name="TextBox 7"/>
-          <p:cNvSpPr txBox="1"/>
-          <p:nvPr/>
-        </p:nvSpPr>
-        <p:spPr>
-          <a:xfrm>
-            <a:off x="1115568" y="2514600"/>
-            <a:ext cx="10527487" cy="1005839"/>
-          </a:xfrm>
-          <a:prstGeom prst="rect">
-            <a:avLst/>
-          </a:prstGeom>
-          <a:noFill/>
-        </p:spPr>
-        <p:txBody>
-          <a:bodyPr wrap="square">
-            <a:spAutoFit/>
-          </a:bodyPr>
-          <a:lstStyle/>
-          <a:p>
-            <a:pPr>
-              <a:spcAft>
-                <a:spcPts val="300"/>
-              </a:spcAft>
-            </a:pPr>
-            <a:r>
-              <a:rPr sz="2200" b="1" i="0">
-                <a:solidFill>
-                  <a:srgbClr val="1A1A1A"/>
-                </a:solidFill>
-                <a:latin typeface="Arial"/>
-              </a:rPr>
-              <a:t>The writer never accepts alone.</a:t>
-            </a:r>
-          </a:p>
-        </p:txBody>
-      </p:sp>
-      <p:sp>
-        <p:nvSpPr>
-          <p:cNvPr id="9" name="Rectangle 8"/>
-          <p:cNvSpPr/>
-          <p:nvPr/>
-        </p:nvSpPr>
-        <p:spPr>
-          <a:xfrm>
-            <a:off x="621792" y="3525012"/>
-            <a:ext cx="10881360" cy="12700"/>
-          </a:xfrm>
-          <a:prstGeom prst="rect">
-            <a:avLst/>
-          </a:prstGeom>
-          <a:solidFill>
-            <a:srgbClr val="DDECF4"/>
-          </a:solidFill>
-          <a:ln>
-            <a:noFill/>
-          </a:ln>
-          <a:effectLst/>
-        </p:spPr>
-        <p:style>
-          <a:lnRef idx="1">
-            <a:schemeClr val="accent1"/>
-          </a:lnRef>
-          <a:fillRef idx="3">
-            <a:schemeClr val="accent1"/>
-          </a:fillRef>
-          <a:effectRef idx="2">
-            <a:schemeClr val="accent1"/>
-          </a:effectRef>
-          <a:fontRef idx="minor">
-            <a:schemeClr val="lt1"/>
-          </a:fontRef>
-        </p:style>
-        <p:txBody>
-          <a:bodyPr rtlCol="0" anchor="ctr"/>
-          <a:lstStyle/>
-          <a:p>
-            <a:pPr algn="ctr"/>
-          </a:p>
-        </p:txBody>
-      </p:sp>
-      <p:sp>
-        <p:nvSpPr>
-          <p:cNvPr id="10" name="Oval 9"/>
-          <p:cNvSpPr/>
-          <p:nvPr/>
-        </p:nvSpPr>
-        <p:spPr>
-          <a:xfrm>
-            <a:off x="621792" y="3611879"/>
-            <a:ext cx="310896" cy="310896"/>
-          </a:xfrm>
-          <a:prstGeom prst="ellipse">
-            <a:avLst/>
-          </a:prstGeom>
-          <a:solidFill>
-            <a:srgbClr val="009CD6"/>
-          </a:solidFill>
-          <a:ln>
-            <a:noFill/>
-          </a:ln>
-          <a:effectLst/>
-        </p:spPr>
-        <p:style>
-          <a:lnRef idx="1">
-            <a:schemeClr val="accent1"/>
-          </a:lnRef>
-          <a:fillRef idx="3">
-            <a:schemeClr val="accent1"/>
-          </a:fillRef>
-          <a:effectRef idx="2">
-            <a:schemeClr val="accent1"/>
-          </a:effectRef>
-          <a:fontRef idx="minor">
-            <a:schemeClr val="lt1"/>
-          </a:fontRef>
-        </p:style>
-        <p:txBody>
-          <a:bodyPr rtlCol="0" anchor="ctr" lIns="0" rIns="0" tIns="0" bIns="0" wrap="square"/>
-          <a:lstStyle/>
-          <a:p>
-            <a:pPr algn="ctr"/>
-            <a:r>
-              <a:rPr sz="1300" b="1" i="0">
-                <a:solidFill>
-                  <a:srgbClr val="FFFFFF"/>
-                </a:solidFill>
-                <a:latin typeface="Arial"/>
-              </a:rPr>
-              <a:t>3</a:t>
-            </a:r>
-          </a:p>
-        </p:txBody>
-      </p:sp>
-      <p:sp>
-        <p:nvSpPr>
-          <p:cNvPr id="11" name="TextBox 10"/>
-          <p:cNvSpPr txBox="1"/>
-          <p:nvPr/>
-        </p:nvSpPr>
-        <p:spPr>
-          <a:xfrm>
-            <a:off x="1115568" y="3566160"/>
-            <a:ext cx="10527487" cy="1005839"/>
-          </a:xfrm>
-          <a:prstGeom prst="rect">
-            <a:avLst/>
-          </a:prstGeom>
-          <a:noFill/>
-        </p:spPr>
-        <p:txBody>
-          <a:bodyPr wrap="square">
-            <a:spAutoFit/>
-          </a:bodyPr>
-          <a:lstStyle/>
-          <a:p>
-            <a:pPr>
-              <a:spcAft>
-                <a:spcPts val="300"/>
-              </a:spcAft>
-            </a:pPr>
-            <a:r>
-              <a:rPr sz="2200" b="1" i="0">
-                <a:solidFill>
-                  <a:srgbClr val="1A1A1A"/>
-                </a:solidFill>
-                <a:latin typeface="Arial"/>
-              </a:rPr>
-              <a:t>The person who will live with it is in the room.</a:t>
-            </a:r>
-          </a:p>
-        </p:txBody>
-      </p:sp>
-      <p:sp>
-        <p:nvSpPr>
-          <p:cNvPr id="12" name="TextBox 11"/>
-          <p:cNvSpPr txBox="1"/>
-          <p:nvPr/>
-        </p:nvSpPr>
-        <p:spPr>
-          <a:xfrm>
-            <a:off x="457200" y="6473952"/>
-            <a:ext cx="7772400" cy="292608"/>
-          </a:xfrm>
-          <a:prstGeom prst="rect">
-            <a:avLst/>
-          </a:prstGeom>
-          <a:noFill/>
-        </p:spPr>
-        <p:txBody>
-          <a:bodyPr wrap="square">
-            <a:spAutoFit/>
-          </a:bodyPr>
-          <a:lstStyle/>
-          <a:p>
-            <a:r>
-              <a:rPr sz="900" b="0" i="0">
-                <a:solidFill>
-                  <a:srgbClr val="595959"/>
-                </a:solidFill>
-                <a:latin typeface="Arial"/>
-              </a:rPr>
-              <a:t>1.5 · Who writes, who checks, who accepts</a:t>
+              <a:t>www.itu.int</a:t>
             </a:r>
           </a:p>
         </p:txBody>
@@ -26193,249 +24715,6 @@
 </file>
 
 <file path=ppt/slides/slide43.xml><?xml version="1.0" encoding="utf-8"?>
-<p:sld xmlns:a="http://schemas.openxmlformats.org/drawingml/2006/main" xmlns:p="http://schemas.openxmlformats.org/presentationml/2006/main" xmlns:r="http://schemas.openxmlformats.org/officeDocument/2006/relationships">
-  <p:cSld>
-    <p:spTree>
-      <p:nvGrpSpPr>
-        <p:cNvPr id="1" name=""/>
-        <p:cNvGrpSpPr/>
-        <p:nvPr/>
-      </p:nvGrpSpPr>
-      <p:grpSpPr/>
-      <p:sp>
-        <p:nvSpPr>
-          <p:cNvPr id="2" name="TextBox 1"/>
-          <p:cNvSpPr txBox="1"/>
-          <p:nvPr/>
-        </p:nvSpPr>
-        <p:spPr>
-          <a:xfrm>
-            <a:off x="1005840" y="2103120"/>
-            <a:ext cx="10149840" cy="2377440"/>
-          </a:xfrm>
-          <a:prstGeom prst="rect">
-            <a:avLst/>
-          </a:prstGeom>
-          <a:noFill/>
-        </p:spPr>
-        <p:txBody>
-          <a:bodyPr wrap="square">
-            <a:spAutoFit/>
-          </a:bodyPr>
-          <a:lstStyle/>
-          <a:p>
-            <a:r>
-              <a:rPr sz="3000" b="1" i="0">
-                <a:solidFill>
-                  <a:srgbClr val="1A1A1A"/>
-                </a:solidFill>
-                <a:latin typeface="Arial"/>
-              </a:rPr>
-              <a:t>The AI assistant may draft; a named person accepts, amends or sets aside each proposal, and only what was accepted stands.</a:t>
-            </a:r>
-          </a:p>
-        </p:txBody>
-      </p:sp>
-      <p:sp>
-        <p:nvSpPr>
-          <p:cNvPr id="3" name="TextBox 2"/>
-          <p:cNvSpPr txBox="1"/>
-          <p:nvPr/>
-        </p:nvSpPr>
-        <p:spPr>
-          <a:xfrm>
-            <a:off x="1005840" y="1554480"/>
-            <a:ext cx="5486400" cy="365760"/>
-          </a:xfrm>
-          <a:prstGeom prst="rect">
-            <a:avLst/>
-          </a:prstGeom>
-          <a:noFill/>
-        </p:spPr>
-        <p:txBody>
-          <a:bodyPr wrap="square">
-            <a:spAutoFit/>
-          </a:bodyPr>
-          <a:lstStyle/>
-          <a:p>
-            <a:r>
-              <a:rPr sz="1200" b="1" i="0">
-                <a:solidFill>
-                  <a:srgbClr val="006E96"/>
-                </a:solidFill>
-                <a:latin typeface="Arial"/>
-              </a:rPr>
-              <a:t>IN ONE SENTENCE</a:t>
-            </a:r>
-          </a:p>
-        </p:txBody>
-      </p:sp>
-      <p:sp>
-        <p:nvSpPr>
-          <p:cNvPr id="4" name="Rounded Rectangle 3"/>
-          <p:cNvSpPr/>
-          <p:nvPr/>
-        </p:nvSpPr>
-        <p:spPr>
-          <a:xfrm>
-            <a:off x="658368" y="4709160"/>
-            <a:ext cx="10881360" cy="1554480"/>
-          </a:xfrm>
-          <a:prstGeom prst="roundRect">
-            <a:avLst>
-              <a:gd name="adj" fmla="val 4500"/>
-            </a:avLst>
-          </a:prstGeom>
-          <a:solidFill>
-            <a:srgbClr val="FFFFFF"/>
-          </a:solidFill>
-          <a:ln w="9525">
-            <a:solidFill>
-              <a:srgbClr val="009CD6"/>
-            </a:solidFill>
-          </a:ln>
-          <a:effectLst/>
-        </p:spPr>
-        <p:style>
-          <a:lnRef idx="1">
-            <a:schemeClr val="accent1"/>
-          </a:lnRef>
-          <a:fillRef idx="3">
-            <a:schemeClr val="accent1"/>
-          </a:fillRef>
-          <a:effectRef idx="2">
-            <a:schemeClr val="accent1"/>
-          </a:effectRef>
-          <a:fontRef idx="minor">
-            <a:schemeClr val="lt1"/>
-          </a:fontRef>
-        </p:style>
-        <p:txBody>
-          <a:bodyPr rtlCol="0" anchor="ctr" wrap="square" lIns="228600" rIns="228600" tIns="109728" bIns="109728">
-            <a:noAutofit/>
-          </a:bodyPr>
-          <a:lstStyle/>
-          <a:p>
-            <a:pPr algn="l">
-              <a:spcAft>
-                <a:spcPts val="400"/>
-              </a:spcAft>
-            </a:pPr>
-            <a:r>
-              <a:rPr sz="1800" b="1" i="0">
-                <a:solidFill>
-                  <a:srgbClr val="006E96"/>
-                </a:solidFill>
-                <a:latin typeface="Arial"/>
-              </a:rPr>
-              <a:t>Do this on your own sector. </a:t>
-            </a:r>
-            <a:r>
-              <a:rPr sz="1800" b="1" i="0">
-                <a:solidFill>
-                  <a:srgbClr val="1A1A1A"/>
-                </a:solidFill>
-                <a:latin typeface="Arial"/>
-              </a:rPr>
-              <a:t>Draft who writes, checks and accepts each document.</a:t>
-            </a:r>
-          </a:p>
-          <a:p>
-            <a:pPr algn="l">
-              <a:spcAft>
-                <a:spcPts val="400"/>
-              </a:spcAft>
-            </a:pPr>
-            <a:r>
-              <a:rPr sz="1800" b="0" i="0">
-                <a:solidFill>
-                  <a:srgbClr val="595959"/>
-                </a:solidFill>
-                <a:latin typeface="Arial"/>
-              </a:rPr>
-              <a:t>The prompt in the companion material gives you a table of who writes, checks and accepts each of the twelve documents for your project team. Before the next video.</a:t>
-            </a:r>
-          </a:p>
-        </p:txBody>
-      </p:sp>
-      <p:sp>
-        <p:nvSpPr>
-          <p:cNvPr id="5" name="TextBox 4"/>
-          <p:cNvSpPr txBox="1"/>
-          <p:nvPr/>
-        </p:nvSpPr>
-        <p:spPr>
-          <a:xfrm>
-            <a:off x="457200" y="6473952"/>
-            <a:ext cx="7772400" cy="292608"/>
-          </a:xfrm>
-          <a:prstGeom prst="rect">
-            <a:avLst/>
-          </a:prstGeom>
-          <a:noFill/>
-        </p:spPr>
-        <p:txBody>
-          <a:bodyPr wrap="square">
-            <a:spAutoFit/>
-          </a:bodyPr>
-          <a:lstStyle/>
-          <a:p>
-            <a:r>
-              <a:rPr sz="900" b="0" i="0">
-                <a:solidFill>
-                  <a:srgbClr val="595959"/>
-                </a:solidFill>
-                <a:latin typeface="Arial"/>
-              </a:rPr>
-              <a:t>1.5 · Who writes, who checks, who accepts</a:t>
-            </a:r>
-          </a:p>
-        </p:txBody>
-      </p:sp>
-      <p:sp>
-        <p:nvSpPr>
-          <p:cNvPr id="6" name="TextBox 5"/>
-          <p:cNvSpPr txBox="1"/>
-          <p:nvPr/>
-        </p:nvSpPr>
-        <p:spPr>
-          <a:xfrm>
-            <a:off x="10058400" y="6473952"/>
-            <a:ext cx="1673352" cy="292608"/>
-          </a:xfrm>
-          <a:prstGeom prst="rect">
-            <a:avLst/>
-          </a:prstGeom>
-          <a:noFill/>
-        </p:spPr>
-        <p:txBody>
-          <a:bodyPr wrap="square">
-            <a:spAutoFit/>
-          </a:bodyPr>
-          <a:lstStyle/>
-          <a:p>
-            <a:pPr algn="r"/>
-            <a:r>
-              <a:rPr sz="900" b="0" i="0">
-                <a:solidFill>
-                  <a:srgbClr val="595959"/>
-                </a:solidFill>
-                <a:latin typeface="Arial"/>
-              </a:rPr>
-              <a:t>www.itu.int</a:t>
-            </a:r>
-          </a:p>
-        </p:txBody>
-      </p:sp>
-    </p:spTree>
-  </p:cSld>
-  <p:clrMapOvr>
-    <a:masterClrMapping/>
-  </p:clrMapOvr>
-</p:sld>
-</file>
-
-<file path=ppt/slides/slide44.xml><?xml version="1.0" encoding="utf-8"?>
 <p:sld xmlns:a="http://schemas.openxmlformats.org/drawingml/2006/main" xmlns:p="http://schemas.openxmlformats.org/presentationml/2006/main" xmlns:r="http://schemas.openxmlformats.org/officeDocument/2006/relationships">
   <p:cSld>
     <p:spTree>
@@ -27705,262 +25984,33 @@
           </a:p>
         </p:txBody>
       </p:sp>
-      <p:sp>
-        <p:nvSpPr>
-          <p:cNvPr id="4" name="TextBox 3"/>
-          <p:cNvSpPr txBox="1"/>
+      <p:pic>
+        <p:nvPicPr>
+          <p:cNvPr id="4" name="kp4-figure F2" descr="F2_three-places.png"/>
+          <p:cNvPicPr>
+            <a:picLocks noChangeAspect="1"/>
+          </p:cNvPicPr>
           <p:nvPr/>
-        </p:nvSpPr>
-        <p:spPr>
-          <a:xfrm>
-            <a:off x="658368" y="1463040"/>
-            <a:ext cx="10984687" cy="1524000"/>
-          </a:xfrm>
-          <a:prstGeom prst="rect">
-            <a:avLst/>
-          </a:prstGeom>
-          <a:noFill/>
-        </p:spPr>
-        <p:txBody>
-          <a:bodyPr wrap="square">
-            <a:spAutoFit/>
-          </a:bodyPr>
-          <a:lstStyle/>
-          <a:p>
-            <a:pPr>
-              <a:spcAft>
-                <a:spcPts val="300"/>
-              </a:spcAft>
-            </a:pPr>
-            <a:r>
-              <a:rPr sz="1900" b="1" i="0">
-                <a:solidFill>
-                  <a:srgbClr val="1A1A1A"/>
-                </a:solidFill>
-                <a:latin typeface="Arial"/>
-              </a:rPr>
-              <a:t>May MoEYS read PHEQA's register? Never decided.</a:t>
-            </a:r>
-          </a:p>
-          <a:p>
-            <a:pPr>
-              <a:spcAft>
-                <a:spcPts val="300"/>
-              </a:spcAft>
-            </a:pPr>
-            <a:r>
-              <a:rPr sz="1550" b="0" i="0">
-                <a:solidFill>
-                  <a:srgbClr val="595959"/>
-                </a:solidFill>
-                <a:latin typeface="Arial"/>
-              </a:rPr>
-              <a:t>A question nobody decided.</a:t>
-            </a:r>
-          </a:p>
-        </p:txBody>
-      </p:sp>
-      <p:sp>
-        <p:nvSpPr>
-          <p:cNvPr id="5" name="Rectangle 4"/>
-          <p:cNvSpPr/>
-          <p:nvPr/>
-        </p:nvSpPr>
-        <p:spPr>
-          <a:xfrm>
-            <a:off x="621792" y="2991612"/>
-            <a:ext cx="10881360" cy="12700"/>
-          </a:xfrm>
-          <a:prstGeom prst="rect">
-            <a:avLst/>
-          </a:prstGeom>
-          <a:solidFill>
-            <a:srgbClr val="DDECF4"/>
-          </a:solidFill>
-          <a:ln>
-            <a:noFill/>
-          </a:ln>
-          <a:effectLst/>
-        </p:spPr>
-        <p:style>
-          <a:lnRef idx="1">
-            <a:schemeClr val="accent1"/>
-          </a:lnRef>
-          <a:fillRef idx="3">
-            <a:schemeClr val="accent1"/>
-          </a:fillRef>
-          <a:effectRef idx="2">
-            <a:schemeClr val="accent1"/>
-          </a:effectRef>
-          <a:fontRef idx="minor">
-            <a:schemeClr val="lt1"/>
-          </a:fontRef>
-        </p:style>
-        <p:txBody>
-          <a:bodyPr rtlCol="0" anchor="ctr"/>
-          <a:lstStyle/>
-          <a:p>
-            <a:pPr algn="ctr"/>
-          </a:p>
-        </p:txBody>
-      </p:sp>
-      <p:sp>
-        <p:nvSpPr>
-          <p:cNvPr id="6" name="TextBox 5"/>
-          <p:cNvSpPr txBox="1"/>
-          <p:nvPr/>
-        </p:nvSpPr>
-        <p:spPr>
-          <a:xfrm>
-            <a:off x="658368" y="3032760"/>
-            <a:ext cx="10984687" cy="1524000"/>
-          </a:xfrm>
-          <a:prstGeom prst="rect">
-            <a:avLst/>
-          </a:prstGeom>
-          <a:noFill/>
-        </p:spPr>
-        <p:txBody>
-          <a:bodyPr wrap="square">
-            <a:spAutoFit/>
-          </a:bodyPr>
-          <a:lstStyle/>
-          <a:p>
-            <a:pPr>
-              <a:spcAft>
-                <a:spcPts val="300"/>
-              </a:spcAft>
-            </a:pPr>
-            <a:r>
-              <a:rPr sz="1900" b="1" i="0">
-                <a:solidFill>
-                  <a:srgbClr val="1A1A1A"/>
-                </a:solidFill>
-                <a:latin typeface="Arial"/>
-              </a:rPr>
-              <a:t>PHEQA's number INS-00217 never reached MoEYS.</a:t>
-            </a:r>
-          </a:p>
-          <a:p>
-            <a:pPr>
-              <a:spcAft>
-                <a:spcPts val="300"/>
-              </a:spcAft>
-            </a:pPr>
-            <a:r>
-              <a:rPr sz="1550" b="0" i="0">
-                <a:solidFill>
-                  <a:srgbClr val="595959"/>
-                </a:solidFill>
-                <a:latin typeface="Arial"/>
-              </a:rPr>
-              <a:t>An answer nobody passed on.</a:t>
-            </a:r>
-          </a:p>
-        </p:txBody>
-      </p:sp>
-      <p:sp>
-        <p:nvSpPr>
-          <p:cNvPr id="7" name="Rectangle 6"/>
-          <p:cNvSpPr/>
-          <p:nvPr/>
-        </p:nvSpPr>
-        <p:spPr>
-          <a:xfrm>
-            <a:off x="621792" y="4561332"/>
-            <a:ext cx="10881360" cy="12700"/>
-          </a:xfrm>
-          <a:prstGeom prst="rect">
-            <a:avLst/>
-          </a:prstGeom>
-          <a:solidFill>
-            <a:srgbClr val="DDECF4"/>
-          </a:solidFill>
-          <a:ln>
-            <a:noFill/>
-          </a:ln>
-          <a:effectLst/>
-        </p:spPr>
-        <p:style>
-          <a:lnRef idx="1">
-            <a:schemeClr val="accent1"/>
-          </a:lnRef>
-          <a:fillRef idx="3">
-            <a:schemeClr val="accent1"/>
-          </a:fillRef>
-          <a:effectRef idx="2">
-            <a:schemeClr val="accent1"/>
-          </a:effectRef>
-          <a:fontRef idx="minor">
-            <a:schemeClr val="lt1"/>
-          </a:fontRef>
-        </p:style>
-        <p:txBody>
-          <a:bodyPr rtlCol="0" anchor="ctr"/>
-          <a:lstStyle/>
-          <a:p>
-            <a:pPr algn="ctr"/>
-          </a:p>
-        </p:txBody>
-      </p:sp>
-      <p:sp>
-        <p:nvSpPr>
-          <p:cNvPr id="8" name="TextBox 7"/>
-          <p:cNvSpPr txBox="1"/>
-          <p:nvPr/>
-        </p:nvSpPr>
-        <p:spPr>
-          <a:xfrm>
-            <a:off x="658368" y="4602480"/>
-            <a:ext cx="10984687" cy="1524000"/>
-          </a:xfrm>
-          <a:prstGeom prst="rect">
-            <a:avLst/>
-          </a:prstGeom>
-          <a:noFill/>
-        </p:spPr>
-        <p:txBody>
-          <a:bodyPr wrap="square">
-            <a:spAutoFit/>
-          </a:bodyPr>
-          <a:lstStyle/>
-          <a:p>
-            <a:pPr>
-              <a:spcAft>
-                <a:spcPts val="300"/>
-              </a:spcAft>
-            </a:pPr>
-            <a:r>
-              <a:rPr sz="1900" b="1" i="0">
-                <a:solidFill>
-                  <a:srgbClr val="1A1A1A"/>
-                </a:solidFill>
-                <a:latin typeface="Arial"/>
-              </a:rPr>
-              <a:t>A fact is entered once: written in the strategy, checked nowhere.</a:t>
-            </a:r>
-          </a:p>
-          <a:p>
-            <a:pPr>
-              <a:spcAft>
-                <a:spcPts val="300"/>
-              </a:spcAft>
-            </a:pPr>
-            <a:r>
-              <a:rPr sz="1550" b="0" i="0">
-                <a:solidFill>
-                  <a:srgbClr val="595959"/>
-                </a:solidFill>
-                <a:latin typeface="Arial"/>
-              </a:rPr>
-              <a:t>A rule nobody enforced.</a:t>
-            </a:r>
-          </a:p>
-        </p:txBody>
-      </p:sp>
-      <p:sp>
-        <p:nvSpPr>
-          <p:cNvPr id="9" name="TextBox 8"/>
+        </p:nvPicPr>
+        <p:blipFill>
+          <a:blip r:embed="rId2"/>
+          <a:stretch>
+            <a:fillRect/>
+          </a:stretch>
+        </p:blipFill>
+        <p:spPr>
+          <a:xfrm>
+            <a:off x="1844824" y="1280160"/>
+            <a:ext cx="8508446" cy="5074920"/>
+          </a:xfrm>
+          <a:prstGeom prst="rect">
+            <a:avLst/>
+          </a:prstGeom>
+        </p:spPr>
+      </p:pic>
+      <p:sp>
+        <p:nvSpPr>
+          <p:cNvPr id="5" name="TextBox 4"/>
           <p:cNvSpPr txBox="1"/>
           <p:nvPr/>
         </p:nvSpPr>
